--- a/In.Plan DP process 06-09-2026.pptx
+++ b/In.Plan DP process 06-09-2026.pptx
@@ -7,7 +7,7 @@
   <p:sldIdLst>
     <p:sldId id="256" r:id="rId7"/>
   </p:sldIdLst>
-  <p:sldSz cx="12192000" cy="6858000" type="screen4x3"/>
+  <p:sldSz cx="12192000" cy="7080000" type="screen4x3"/>
   <p:notesSz cx="6858000" cy="9144000"/>
   <p:defaultTextStyle>
     <a:defPPr>
@@ -3097,7 +3097,7 @@
         <p:spPr>
           <a:xfrm>
             <a:off x="1880000" y="980000"/>
-            <a:ext cx="2030000" cy="5500000"/>
+            <a:ext cx="2030000" cy="6000000"/>
           </a:xfrm>
           <a:prstGeom prst="rect">
             <a:avLst/>
@@ -3211,7 +3211,7 @@
         <p:spPr>
           <a:xfrm>
             <a:off x="1940000" y="1760000"/>
-            <a:ext cx="1910000" cy="1176000"/>
+            <a:ext cx="1910000" cy="1344000"/>
           </a:xfrm>
           <a:prstGeom prst="rect">
             <a:avLst/>
@@ -3226,7 +3226,7 @@
           <a:p>
             <a:r>
               <a:rPr sz="900" b="0"/>
-              <a:t>Полнота истории и пропуски</a:t>
+              <a:t>Полнота истории Sell-In, Sell-Out, Off-Take и пропуски</a:t>
             </a:r>
           </a:p>
           <a:p>
@@ -3257,7 +3257,7 @@
         </p:nvSpPr>
         <p:spPr>
           <a:xfrm>
-            <a:off x="1940000" y="3086000"/>
+            <a:off x="1940000" y="3254000"/>
             <a:ext cx="1910000" cy="620000"/>
           </a:xfrm>
           <a:prstGeom prst="roundRect">
@@ -3301,8 +3301,8 @@
         </p:nvSpPr>
         <p:spPr>
           <a:xfrm>
-            <a:off x="1940000" y="3806000"/>
-            <a:ext cx="1910000" cy="1008000"/>
+            <a:off x="1940000" y="3974000"/>
+            <a:ext cx="1910000" cy="672000"/>
           </a:xfrm>
           <a:prstGeom prst="rect">
             <a:avLst/>
@@ -3338,12 +3338,6 @@
               <a:t>Исключения планеру</a:t>
             </a:r>
           </a:p>
-          <a:p>
-            <a:r>
-              <a:rPr sz="900" b="0"/>
-              <a:t>Разделение потоков: рынок / внутренний передел / экспорт</a:t>
-            </a:r>
-          </a:p>
         </p:txBody>
       </p:sp>
       <p:sp>
@@ -3355,7 +3349,7 @@
         <p:spPr>
           <a:xfrm>
             <a:off x="3940000" y="980000"/>
-            <a:ext cx="2030000" cy="5500000"/>
+            <a:ext cx="2030000" cy="6000000"/>
           </a:xfrm>
           <a:prstGeom prst="rect">
             <a:avLst/>
@@ -3469,7 +3463,7 @@
         <p:spPr>
           <a:xfrm>
             <a:off x="4000000" y="1760000"/>
-            <a:ext cx="1910000" cy="672000"/>
+            <a:ext cx="1910000" cy="840000"/>
           </a:xfrm>
           <a:prstGeom prst="rect">
             <a:avLst/>
@@ -3496,6 +3490,12 @@
           <a:p>
             <a:r>
               <a:rPr sz="900" b="0"/>
+              <a:t>Тестирование временных рядов</a:t>
+            </a:r>
+          </a:p>
+          <a:p>
+            <a:r>
+              <a:rPr sz="900" b="0"/>
               <a:t>Привязка методов и параметров к сегменту</a:t>
             </a:r>
           </a:p>
@@ -3509,7 +3509,7 @@
         </p:nvSpPr>
         <p:spPr>
           <a:xfrm>
-            <a:off x="4000000" y="2582000"/>
+            <a:off x="4000000" y="2750000"/>
             <a:ext cx="1910000" cy="620000"/>
           </a:xfrm>
           <a:prstGeom prst="roundRect">
@@ -3553,7 +3553,7 @@
         </p:nvSpPr>
         <p:spPr>
           <a:xfrm>
-            <a:off x="4000000" y="3302000"/>
+            <a:off x="4000000" y="3470000"/>
             <a:ext cx="1910000" cy="672000"/>
           </a:xfrm>
           <a:prstGeom prst="rect">
@@ -3581,7 +3581,7 @@
           <a:p>
             <a:r>
               <a:rPr sz="900" b="0"/>
-              <a:t>Референс, коэффициент, даты действия</a:t>
+              <a:t>Запуск по настройкам сегмента и расписанию</a:t>
             </a:r>
           </a:p>
         </p:txBody>
@@ -3594,7 +3594,7 @@
         </p:nvSpPr>
         <p:spPr>
           <a:xfrm>
-            <a:off x="4000000" y="4124000"/>
+            <a:off x="4000000" y="4292000"/>
             <a:ext cx="1910000" cy="620000"/>
           </a:xfrm>
           <a:prstGeom prst="roundRect">
@@ -3632,13 +3632,54 @@
       </p:sp>
       <p:sp>
         <p:nvSpPr>
-          <p:cNvPr id="15" name="Rounded Rectangle 14"/>
+          <p:cNvPr id="15" name="TextBox 14"/>
+          <p:cNvSpPr txBox="1"/>
+          <p:nvPr/>
+        </p:nvSpPr>
+        <p:spPr>
+          <a:xfrm>
+            <a:off x="4000000" y="5012000"/>
+            <a:ext cx="1910000" cy="672000"/>
+          </a:xfrm>
+          <a:prstGeom prst="rect">
+            <a:avLst/>
+          </a:prstGeom>
+          <a:noFill/>
+        </p:spPr>
+        <p:txBody>
+          <a:bodyPr wrap="square">
+            <a:spAutoFit/>
+          </a:bodyPr>
+          <a:lstStyle/>
+          <a:p>
+            <a:r>
+              <a:rPr sz="900" b="0"/>
+              <a:t>Референс, коэффициент, даты действия</a:t>
+            </a:r>
+          </a:p>
+          <a:p>
+            <a:r>
+              <a:rPr sz="900" b="0"/>
+              <a:t>Правило подобия</a:t>
+            </a:r>
+          </a:p>
+          <a:p>
+            <a:r>
+              <a:rPr sz="900" b="0"/>
+              <a:t>Коэффициенты каннибализации</a:t>
+            </a:r>
+          </a:p>
+        </p:txBody>
+      </p:sp>
+      <p:sp>
+        <p:nvSpPr>
+          <p:cNvPr id="16" name="Rounded Rectangle 15"/>
           <p:cNvSpPr/>
           <p:nvPr/>
         </p:nvSpPr>
         <p:spPr>
           <a:xfrm>
-            <a:off x="4000000" y="4894000"/>
+            <a:off x="4000000" y="5834000"/>
             <a:ext cx="1910000" cy="620000"/>
           </a:xfrm>
           <a:prstGeom prst="roundRect">
@@ -3676,13 +3717,13 @@
       </p:sp>
       <p:sp>
         <p:nvSpPr>
-          <p:cNvPr id="16" name="TextBox 15"/>
+          <p:cNvPr id="17" name="TextBox 16"/>
           <p:cNvSpPr txBox="1"/>
           <p:nvPr/>
         </p:nvSpPr>
         <p:spPr>
           <a:xfrm>
-            <a:off x="4000000" y="5614000"/>
+            <a:off x="4000000" y="6554000"/>
             <a:ext cx="1910000" cy="672000"/>
           </a:xfrm>
           <a:prstGeom prst="rect">
@@ -3717,22 +3758,21 @@
       </p:sp>
       <p:sp>
         <p:nvSpPr>
-          <p:cNvPr id="17" name="Rectangle 16"/>
+          <p:cNvPr id="18" name="Rectangle 17"/>
           <p:cNvSpPr/>
           <p:nvPr/>
         </p:nvSpPr>
         <p:spPr>
           <a:xfrm>
-            <a:off x="6000000" y="980000"/>
-            <a:ext cx="2030000" cy="5500000"/>
+            <a:off x="4000000" y="7376000"/>
+            <a:ext cx="1910000" cy="620000"/>
           </a:xfrm>
           <a:prstGeom prst="rect">
             <a:avLst/>
           </a:prstGeom>
-          <a:noFill/>
-          <a:ln>
-            <a:noFill/>
-          </a:ln>
+          <a:solidFill>
+            <a:schemeClr val="accent2"/>
+          </a:solidFill>
         </p:spPr>
         <p:style>
           <a:lnRef idx="1">
@@ -3753,55 +3793,31 @@
           <a:lstStyle/>
           <a:p>
             <a:pPr algn="ctr"/>
-          </a:p>
-        </p:txBody>
-      </p:sp>
-      <p:sp>
-        <p:nvSpPr>
-          <p:cNvPr id="18" name="TextBox 17"/>
-          <p:cNvSpPr txBox="1"/>
-          <p:nvPr/>
-        </p:nvSpPr>
-        <p:spPr>
-          <a:xfrm>
-            <a:off x="6000000" y="500000"/>
-            <a:ext cx="2030000" cy="380000"/>
+            <a:r>
+              <a:rPr sz="900"/>
+              <a:t>Передача базового прогноза в NRM</a:t>
+            </a:r>
+          </a:p>
+        </p:txBody>
+      </p:sp>
+      <p:sp>
+        <p:nvSpPr>
+          <p:cNvPr id="19" name="Rectangle 18"/>
+          <p:cNvSpPr/>
+          <p:nvPr/>
+        </p:nvSpPr>
+        <p:spPr>
+          <a:xfrm>
+            <a:off x="6000000" y="980000"/>
+            <a:ext cx="2030000" cy="6000000"/>
           </a:xfrm>
           <a:prstGeom prst="rect">
             <a:avLst/>
           </a:prstGeom>
           <a:noFill/>
-        </p:spPr>
-        <p:txBody>
-          <a:bodyPr wrap="square">
-            <a:spAutoFit/>
-          </a:bodyPr>
-          <a:lstStyle/>
-          <a:p>
-            <a:r>
-              <a:rPr sz="1100" b="1"/>
-              <a:t>Sell-In по модели канала</a:t>
-            </a:r>
-          </a:p>
-        </p:txBody>
-      </p:sp>
-      <p:sp>
-        <p:nvSpPr>
-          <p:cNvPr id="19" name="Rounded Rectangle 18"/>
-          <p:cNvSpPr/>
-          <p:nvPr/>
-        </p:nvSpPr>
-        <p:spPr>
-          <a:xfrm>
-            <a:off x="6060000" y="1040000"/>
-            <a:ext cx="1910000" cy="620000"/>
-          </a:xfrm>
-          <a:prstGeom prst="roundRect">
-            <a:avLst/>
-          </a:prstGeom>
-          <a:solidFill>
-            <a:schemeClr val="accent1"/>
-          </a:solidFill>
+          <a:ln>
+            <a:noFill/>
+          </a:ln>
         </p:spPr>
         <p:style>
           <a:lnRef idx="1">
@@ -3822,22 +3838,47 @@
           <a:lstStyle/>
           <a:p>
             <a:pPr algn="ctr"/>
-            <a:r>
-              <a:rPr sz="1000"/>
-              <a:t>Прямые каналы: прямой прогноз Sell-In</a:t>
-            </a:r>
-          </a:p>
-        </p:txBody>
-      </p:sp>
-      <p:sp>
-        <p:nvSpPr>
-          <p:cNvPr id="20" name="Rounded Rectangle 19"/>
+          </a:p>
+        </p:txBody>
+      </p:sp>
+      <p:sp>
+        <p:nvSpPr>
+          <p:cNvPr id="20" name="TextBox 19"/>
+          <p:cNvSpPr txBox="1"/>
+          <p:nvPr/>
+        </p:nvSpPr>
+        <p:spPr>
+          <a:xfrm>
+            <a:off x="6000000" y="500000"/>
+            <a:ext cx="2030000" cy="380000"/>
+          </a:xfrm>
+          <a:prstGeom prst="rect">
+            <a:avLst/>
+          </a:prstGeom>
+          <a:noFill/>
+        </p:spPr>
+        <p:txBody>
+          <a:bodyPr wrap="square">
+            <a:spAutoFit/>
+          </a:bodyPr>
+          <a:lstStyle/>
+          <a:p>
+            <a:r>
+              <a:rPr sz="1100" b="1"/>
+              <a:t>Sell-In по модели канала</a:t>
+            </a:r>
+          </a:p>
+        </p:txBody>
+      </p:sp>
+      <p:sp>
+        <p:nvSpPr>
+          <p:cNvPr id="21" name="Rounded Rectangle 20"/>
           <p:cNvSpPr/>
           <p:nvPr/>
         </p:nvSpPr>
         <p:spPr>
           <a:xfrm>
-            <a:off x="6060000" y="1810000"/>
+            <a:off x="6060000" y="1040000"/>
             <a:ext cx="1910000" cy="620000"/>
           </a:xfrm>
           <a:prstGeom prst="roundRect">
@@ -3868,64 +3909,28 @@
             <a:pPr algn="ctr"/>
             <a:r>
               <a:rPr sz="1000"/>
-              <a:t>Sell-Out → баланс → Sell-In</a:t>
-            </a:r>
-          </a:p>
-        </p:txBody>
-      </p:sp>
-      <p:sp>
-        <p:nvSpPr>
-          <p:cNvPr id="21" name="TextBox 20"/>
-          <p:cNvSpPr txBox="1"/>
-          <p:nvPr/>
-        </p:nvSpPr>
-        <p:spPr>
-          <a:xfrm>
-            <a:off x="6060000" y="2530000"/>
-            <a:ext cx="1910000" cy="672000"/>
-          </a:xfrm>
-          <a:prstGeom prst="rect">
-            <a:avLst/>
-          </a:prstGeom>
-          <a:noFill/>
-        </p:spPr>
-        <p:txBody>
-          <a:bodyPr wrap="square">
-            <a:spAutoFit/>
-          </a:bodyPr>
-          <a:lstStyle/>
-          <a:p>
-            <a:r>
-              <a:rPr sz="900" b="0"/>
-              <a:t>Остатки, транзит, открытые заказы, целевой запас</a:t>
-            </a:r>
-          </a:p>
-          <a:p>
-            <a:r>
-              <a:rPr sz="900" b="0"/>
-              <a:t>Прогнозный остаток и дни покрытия</a:t>
-            </a:r>
-          </a:p>
-        </p:txBody>
-      </p:sp>
-      <p:sp>
-        <p:nvSpPr>
-          <p:cNvPr id="22" name="Rectangle 21"/>
+              <a:t>Прямые каналы: прямой прогноз Sell-In</a:t>
+            </a:r>
+          </a:p>
+        </p:txBody>
+      </p:sp>
+      <p:sp>
+        <p:nvSpPr>
+          <p:cNvPr id="22" name="Rounded Rectangle 21"/>
           <p:cNvSpPr/>
           <p:nvPr/>
         </p:nvSpPr>
         <p:spPr>
           <a:xfrm>
-            <a:off x="8060000" y="980000"/>
-            <a:ext cx="2030000" cy="5500000"/>
-          </a:xfrm>
-          <a:prstGeom prst="rect">
-            <a:avLst/>
-          </a:prstGeom>
-          <a:noFill/>
-          <a:ln>
-            <a:noFill/>
-          </a:ln>
+            <a:off x="6060000" y="1810000"/>
+            <a:ext cx="1910000" cy="620000"/>
+          </a:xfrm>
+          <a:prstGeom prst="roundRect">
+            <a:avLst/>
+          </a:prstGeom>
+          <a:solidFill>
+            <a:schemeClr val="accent1"/>
+          </a:solidFill>
         </p:spPr>
         <p:style>
           <a:lnRef idx="1">
@@ -3946,6 +3951,10 @@
           <a:lstStyle/>
           <a:p>
             <a:pPr algn="ctr"/>
+            <a:r>
+              <a:rPr sz="1000"/>
+              <a:t>Sell-Out → баланс → Sell-In</a:t>
+            </a:r>
           </a:p>
         </p:txBody>
       </p:sp>
@@ -3957,8 +3966,8 @@
         </p:nvSpPr>
         <p:spPr>
           <a:xfrm>
-            <a:off x="8060000" y="500000"/>
-            <a:ext cx="2030000" cy="380000"/>
+            <a:off x="6060000" y="2530000"/>
+            <a:ext cx="1910000" cy="672000"/>
           </a:xfrm>
           <a:prstGeom prst="rect">
             <a:avLst/>
@@ -3972,29 +3981,36 @@
           <a:lstStyle/>
           <a:p>
             <a:r>
-              <a:rPr sz="1100" b="1"/>
-              <a:t>Обогащение и согласование</a:t>
-            </a:r>
-          </a:p>
-        </p:txBody>
-      </p:sp>
-      <p:sp>
-        <p:nvSpPr>
-          <p:cNvPr id="24" name="Rounded Rectangle 23"/>
+              <a:rPr sz="900" b="0"/>
+              <a:t>Остатки, транзит, открытые заказы, целевой запас</a:t>
+            </a:r>
+          </a:p>
+          <a:p>
+            <a:r>
+              <a:rPr sz="900" b="0"/>
+              <a:t>Прогнозный остаток и дни покрытия</a:t>
+            </a:r>
+          </a:p>
+        </p:txBody>
+      </p:sp>
+      <p:sp>
+        <p:nvSpPr>
+          <p:cNvPr id="24" name="Rectangle 23"/>
           <p:cNvSpPr/>
           <p:nvPr/>
         </p:nvSpPr>
         <p:spPr>
           <a:xfrm>
-            <a:off x="8120000" y="1040000"/>
-            <a:ext cx="1910000" cy="620000"/>
-          </a:xfrm>
-          <a:prstGeom prst="roundRect">
-            <a:avLst/>
-          </a:prstGeom>
-          <a:solidFill>
-            <a:schemeClr val="accent1"/>
-          </a:solidFill>
+            <a:off x="8060000" y="980000"/>
+            <a:ext cx="2030000" cy="6000000"/>
+          </a:xfrm>
+          <a:prstGeom prst="rect">
+            <a:avLst/>
+          </a:prstGeom>
+          <a:noFill/>
+          <a:ln>
+            <a:noFill/>
+          </a:ln>
         </p:spPr>
         <p:style>
           <a:lnRef idx="1">
@@ -4015,10 +4031,6 @@
           <a:lstStyle/>
           <a:p>
             <a:pPr algn="ctr"/>
-            <a:r>
-              <a:rPr sz="1000"/>
-              <a:t>Building Blocks и корректировки</a:t>
-            </a:r>
           </a:p>
         </p:txBody>
       </p:sp>
@@ -4030,8 +4042,8 @@
         </p:nvSpPr>
         <p:spPr>
           <a:xfrm>
-            <a:off x="8120000" y="1760000"/>
-            <a:ext cx="1910000" cy="840000"/>
+            <a:off x="8060000" y="500000"/>
+            <a:ext cx="2030000" cy="380000"/>
           </a:xfrm>
           <a:prstGeom prst="rect">
             <a:avLst/>
@@ -4045,20 +4057,8 @@
           <a:lstStyle/>
           <a:p>
             <a:r>
-              <a:rPr sz="900" b="0"/>
-              <a:t>Объёмные, процентные, замещающие блоки</a:t>
-            </a:r>
-          </a:p>
-          <a:p>
-            <a:r>
-              <a:rPr sz="900" b="0"/>
-              <a:t>Распределение вниз, пересчёт вверх</a:t>
-            </a:r>
-          </a:p>
-          <a:p>
-            <a:r>
-              <a:rPr sz="900" b="0"/>
-              <a:t>Версии, аудит</a:t>
+              <a:rPr sz="1100" b="1"/>
+              <a:t>Обогащение и согласование</a:t>
             </a:r>
           </a:p>
         </p:txBody>
@@ -4071,7 +4071,7 @@
         </p:nvSpPr>
         <p:spPr>
           <a:xfrm>
-            <a:off x="8120000" y="2750000"/>
+            <a:off x="8120000" y="1040000"/>
             <a:ext cx="1910000" cy="620000"/>
           </a:xfrm>
           <a:prstGeom prst="roundRect">
@@ -4102,7 +4102,7 @@
             <a:pPr algn="ctr"/>
             <a:r>
               <a:rPr sz="1000"/>
-              <a:t>Demand Review Meeting</a:t>
+              <a:t>Building Blocks и корректировки</a:t>
             </a:r>
           </a:p>
         </p:txBody>
@@ -4115,8 +4115,8 @@
         </p:nvSpPr>
         <p:spPr>
           <a:xfrm>
-            <a:off x="8120000" y="3470000"/>
-            <a:ext cx="1910000" cy="672000"/>
+            <a:off x="8120000" y="1760000"/>
+            <a:ext cx="1910000" cy="1176000"/>
           </a:xfrm>
           <a:prstGeom prst="rect">
             <a:avLst/>
@@ -4131,41 +4131,46 @@
           <a:p>
             <a:r>
               <a:rPr sz="900" b="0"/>
-              <a:t>Консенсус в объёме и в деньгах</a:t>
+              <a:t>Объёмные, процентные, замещающие блоки</a:t>
             </a:r>
           </a:p>
           <a:p>
             <a:r>
               <a:rPr sz="900" b="0"/>
-              <a:t>Согласование исключений</a:t>
+              <a:t>Листинг, делистинг, запуск новинок</a:t>
             </a:r>
           </a:p>
           <a:p>
             <a:r>
               <a:rPr sz="900" b="0"/>
-              <a:t>Согласованный план спроса Sell-In</a:t>
-            </a:r>
-          </a:p>
-        </p:txBody>
-      </p:sp>
-      <p:sp>
-        <p:nvSpPr>
-          <p:cNvPr id="28" name="Rectangle 27"/>
+              <a:t>Распределение вниз, пересчёт вверх</a:t>
+            </a:r>
+          </a:p>
+          <a:p>
+            <a:r>
+              <a:rPr sz="900" b="0"/>
+              <a:t>Версии, аудит</a:t>
+            </a:r>
+          </a:p>
+        </p:txBody>
+      </p:sp>
+      <p:sp>
+        <p:nvSpPr>
+          <p:cNvPr id="28" name="Rounded Rectangle 27"/>
           <p:cNvSpPr/>
           <p:nvPr/>
         </p:nvSpPr>
         <p:spPr>
           <a:xfrm>
-            <a:off x="10120000" y="980000"/>
-            <a:ext cx="2030000" cy="5500000"/>
-          </a:xfrm>
-          <a:prstGeom prst="rect">
-            <a:avLst/>
-          </a:prstGeom>
-          <a:noFill/>
-          <a:ln>
-            <a:noFill/>
-          </a:ln>
+            <a:off x="8120000" y="3086000"/>
+            <a:ext cx="1910000" cy="620000"/>
+          </a:xfrm>
+          <a:prstGeom prst="roundRect">
+            <a:avLst/>
+          </a:prstGeom>
+          <a:solidFill>
+            <a:schemeClr val="accent1"/>
+          </a:solidFill>
         </p:spPr>
         <p:style>
           <a:lnRef idx="1">
@@ -4186,6 +4191,10 @@
           <a:lstStyle/>
           <a:p>
             <a:pPr algn="ctr"/>
+            <a:r>
+              <a:rPr sz="1000"/>
+              <a:t>Demand Review Meeting</a:t>
+            </a:r>
           </a:p>
         </p:txBody>
       </p:sp>
@@ -4197,8 +4206,8 @@
         </p:nvSpPr>
         <p:spPr>
           <a:xfrm>
-            <a:off x="10120000" y="500000"/>
-            <a:ext cx="2030000" cy="380000"/>
+            <a:off x="8120000" y="3806000"/>
+            <a:ext cx="1910000" cy="1008000"/>
           </a:xfrm>
           <a:prstGeom prst="rect">
             <a:avLst/>
@@ -4212,29 +4221,54 @@
           <a:lstStyle/>
           <a:p>
             <a:r>
-              <a:rPr sz="1100" b="1"/>
-              <a:t>Публикация и контроль точности</a:t>
-            </a:r>
-          </a:p>
-        </p:txBody>
-      </p:sp>
-      <p:sp>
-        <p:nvSpPr>
-          <p:cNvPr id="30" name="Rounded Rectangle 29"/>
+              <a:rPr sz="900" b="0"/>
+              <a:t>Дашборды и отчёты для DRM</a:t>
+            </a:r>
+          </a:p>
+          <a:p>
+            <a:r>
+              <a:rPr sz="900" b="0"/>
+              <a:t>Консенсус в объёме и в деньгах</a:t>
+            </a:r>
+          </a:p>
+          <a:p>
+            <a:r>
+              <a:rPr sz="900" b="0"/>
+              <a:t>Версии и сценарный анализ</a:t>
+            </a:r>
+          </a:p>
+          <a:p>
+            <a:r>
+              <a:rPr sz="900" b="0"/>
+              <a:t>Согласование исключений</a:t>
+            </a:r>
+          </a:p>
+          <a:p>
+            <a:r>
+              <a:rPr sz="900" b="0"/>
+              <a:t>Согласованный план спроса Sell-In</a:t>
+            </a:r>
+          </a:p>
+        </p:txBody>
+      </p:sp>
+      <p:sp>
+        <p:nvSpPr>
+          <p:cNvPr id="30" name="Rectangle 29"/>
           <p:cNvSpPr/>
           <p:nvPr/>
         </p:nvSpPr>
         <p:spPr>
           <a:xfrm>
-            <a:off x="10180000" y="1040000"/>
-            <a:ext cx="1910000" cy="620000"/>
-          </a:xfrm>
-          <a:prstGeom prst="roundRect">
-            <a:avLst/>
-          </a:prstGeom>
-          <a:solidFill>
-            <a:schemeClr val="accent1"/>
-          </a:solidFill>
+            <a:off x="10120000" y="980000"/>
+            <a:ext cx="2030000" cy="6000000"/>
+          </a:xfrm>
+          <a:prstGeom prst="rect">
+            <a:avLst/>
+          </a:prstGeom>
+          <a:noFill/>
+          <a:ln>
+            <a:noFill/>
+          </a:ln>
         </p:spPr>
         <p:style>
           <a:lnRef idx="1">
@@ -4255,10 +4289,6 @@
           <a:lstStyle/>
           <a:p>
             <a:pPr algn="ctr"/>
-            <a:r>
-              <a:rPr sz="1000"/>
-              <a:t>Публикация плана спроса</a:t>
-            </a:r>
           </a:p>
         </p:txBody>
       </p:sp>
@@ -4270,8 +4300,8 @@
         </p:nvSpPr>
         <p:spPr>
           <a:xfrm>
-            <a:off x="10180000" y="1760000"/>
-            <a:ext cx="1910000" cy="504000"/>
+            <a:off x="10120000" y="500000"/>
+            <a:ext cx="2030000" cy="380000"/>
           </a:xfrm>
           <a:prstGeom prst="rect">
             <a:avLst/>
@@ -4285,20 +4315,8 @@
           <a:lstStyle/>
           <a:p>
             <a:r>
-              <a:rPr sz="900" b="0"/>
-              <a:t>DFU → SKU, публикация с лагом</a:t>
-            </a:r>
-          </a:p>
-          <a:p>
-            <a:r>
-              <a:rPr sz="900" b="0"/>
-              <a:t>Передача плана в SNP и MEIO</a:t>
-            </a:r>
-          </a:p>
-          <a:p>
-            <a:r>
-              <a:rPr sz="900" b="0"/>
-              <a:t>Версия и дата фиксации плана</a:t>
+              <a:rPr sz="1100" b="1"/>
+              <a:t>Публикация и контроль точности</a:t>
             </a:r>
           </a:p>
         </p:txBody>
@@ -4311,7 +4329,7 @@
         </p:nvSpPr>
         <p:spPr>
           <a:xfrm>
-            <a:off x="10180000" y="2414000"/>
+            <a:off x="10180000" y="1040000"/>
             <a:ext cx="1910000" cy="620000"/>
           </a:xfrm>
           <a:prstGeom prst="roundRect">
@@ -4342,7 +4360,7 @@
             <a:pPr algn="ctr"/>
             <a:r>
               <a:rPr sz="1000"/>
-              <a:t>Сверка с ограниченным планом SNP и решение по разрыву</a:t>
+              <a:t>Публикация плана спроса</a:t>
             </a:r>
           </a:p>
         </p:txBody>
@@ -4355,7 +4373,7 @@
         </p:nvSpPr>
         <p:spPr>
           <a:xfrm>
-            <a:off x="10180000" y="3134000"/>
+            <a:off x="10180000" y="1760000"/>
             <a:ext cx="1910000" cy="672000"/>
           </a:xfrm>
           <a:prstGeom prst="rect">
@@ -4371,25 +4389,25 @@
           <a:p>
             <a:r>
               <a:rPr sz="900" b="0"/>
-              <a:t>Ограниченный план из SNP</a:t>
+              <a:t>DFU → SKU, публикация с лагом</a:t>
             </a:r>
           </a:p>
           <a:p>
             <a:r>
               <a:rPr sz="900" b="0"/>
-              <a:t>Дефициты и избытки по периодам</a:t>
+              <a:t>Передача плана в SNP и MEIO</a:t>
             </a:r>
           </a:p>
           <a:p>
             <a:r>
               <a:rPr sz="900" b="0"/>
-              <a:t>Приоритизация клиентов и SKU</a:t>
+              <a:t>Версия и дата фиксации плана</a:t>
             </a:r>
           </a:p>
           <a:p>
             <a:r>
               <a:rPr sz="900" b="0"/>
-              <a:t>Решение по разрыву</a:t>
+              <a:t>Архив прогнозов по лагам</a:t>
             </a:r>
           </a:p>
         </p:txBody>
@@ -4402,7 +4420,7 @@
         </p:nvSpPr>
         <p:spPr>
           <a:xfrm>
-            <a:off x="10180000" y="3956000"/>
+            <a:off x="10180000" y="2582000"/>
             <a:ext cx="1910000" cy="620000"/>
           </a:xfrm>
           <a:prstGeom prst="roundRect">
@@ -4433,7 +4451,7 @@
             <a:pPr algn="ctr"/>
             <a:r>
               <a:rPr sz="1000"/>
-              <a:t>Контроль точности и FVA</a:t>
+              <a:t>Сверка с ограниченным планом SNP и решение по разрыву</a:t>
             </a:r>
           </a:p>
         </p:txBody>
@@ -4446,8 +4464,8 @@
         </p:nvSpPr>
         <p:spPr>
           <a:xfrm>
-            <a:off x="10180000" y="4676000"/>
-            <a:ext cx="1910000" cy="1008000"/>
+            <a:off x="10180000" y="3302000"/>
+            <a:ext cx="1910000" cy="672000"/>
           </a:xfrm>
           <a:prstGeom prst="rect">
             <a:avLst/>
@@ -4462,25 +4480,25 @@
           <a:p>
             <a:r>
               <a:rPr sz="900" b="0"/>
-              <a:t>FA, MAPE, BIAS, WAPE по версии и лагу</a:t>
+              <a:t>Ограниченный план из SNP</a:t>
             </a:r>
           </a:p>
           <a:p>
             <a:r>
               <a:rPr sz="900" b="0"/>
-              <a:t>FVA: наивный → статистика → Building Blocks → консенсус</a:t>
+              <a:t>Дефициты и избытки по периодам</a:t>
             </a:r>
           </a:p>
           <a:p>
             <a:r>
               <a:rPr sz="900" b="0"/>
-              <a:t>BIAS по авторам корректировок</a:t>
+              <a:t>Приоритизация клиентов и SKU</a:t>
             </a:r>
           </a:p>
           <a:p>
             <a:r>
               <a:rPr sz="900" b="0"/>
-              <a:t>Алерты точности и разбор причин</a:t>
+              <a:t>Решение по разрыву</a:t>
             </a:r>
           </a:p>
         </p:txBody>
@@ -4493,7 +4511,7 @@
         </p:nvSpPr>
         <p:spPr>
           <a:xfrm>
-            <a:off x="10180000" y="5834000"/>
+            <a:off x="10180000" y="4124000"/>
             <a:ext cx="1910000" cy="620000"/>
           </a:xfrm>
           <a:prstGeom prst="roundRect">
@@ -4524,7 +4542,7 @@
             <a:pPr algn="ctr"/>
             <a:r>
               <a:rPr sz="1000"/>
-              <a:t>Анализ предупреждений</a:t>
+              <a:t>Контроль точности и FVA</a:t>
             </a:r>
           </a:p>
         </p:txBody>
@@ -4537,8 +4555,8 @@
         </p:nvSpPr>
         <p:spPr>
           <a:xfrm>
-            <a:off x="10180000" y="6554000"/>
-            <a:ext cx="1910000" cy="1344000"/>
+            <a:off x="10180000" y="4844000"/>
+            <a:ext cx="1910000" cy="1176000"/>
           </a:xfrm>
           <a:prstGeom prst="rect">
             <a:avLst/>
@@ -4553,45 +4571,45 @@
           <a:p>
             <a:r>
               <a:rPr sz="900" b="0"/>
-              <a:t>Предупреждение: точность ниже порога по FA или BIAS</a:t>
+              <a:t>FA, MAPE, BIAS, WAPE по версии и лагу</a:t>
             </a:r>
           </a:p>
           <a:p>
             <a:r>
               <a:rPr sz="900" b="0"/>
-              <a:t>Предупреждение: разрыв с ограниченным планом SNP</a:t>
+              <a:t>FVA: наивный → статистика → Building Blocks → консенсус</a:t>
             </a:r>
           </a:p>
           <a:p>
             <a:r>
               <a:rPr sz="900" b="0"/>
-              <a:t>Предупреждение: прогноз без истории по новому DFU</a:t>
+              <a:t>BIAS по авторам корректировок</a:t>
             </a:r>
           </a:p>
           <a:p>
             <a:r>
               <a:rPr sz="900" b="0"/>
-              <a:t>Предупреждение: ручная корректировка без обоснования</a:t>
-            </a:r>
-          </a:p>
-        </p:txBody>
-      </p:sp>
-      <p:sp>
-        <p:nvSpPr>
-          <p:cNvPr id="38" name="Rectangle 37"/>
+              <a:t>Дашборды точности и эффективности моделей</a:t>
+            </a:r>
+          </a:p>
+        </p:txBody>
+      </p:sp>
+      <p:sp>
+        <p:nvSpPr>
+          <p:cNvPr id="38" name="Rounded Rectangle 37"/>
           <p:cNvSpPr/>
           <p:nvPr/>
         </p:nvSpPr>
         <p:spPr>
           <a:xfrm>
-            <a:off x="10180000" y="8048000"/>
+            <a:off x="10180000" y="6170000"/>
             <a:ext cx="1910000" cy="620000"/>
           </a:xfrm>
-          <a:prstGeom prst="rect">
+          <a:prstGeom prst="roundRect">
             <a:avLst/>
           </a:prstGeom>
           <a:solidFill>
-            <a:schemeClr val="accent2"/>
+            <a:schemeClr val="accent1"/>
           </a:solidFill>
         </p:spPr>
         <p:style>
@@ -4614,22 +4632,69 @@
           <a:p>
             <a:pPr algn="ctr"/>
             <a:r>
-              <a:rPr sz="900"/>
-              <a:t>Передача неограниченного плана спроса в SNP и MEIO</a:t>
-            </a:r>
-          </a:p>
-        </p:txBody>
-      </p:sp>
-      <p:sp>
-        <p:nvSpPr>
-          <p:cNvPr id="39" name="Rectangle 38"/>
+              <a:rPr sz="1000"/>
+              <a:t>Анализ предупреждений</a:t>
+            </a:r>
+          </a:p>
+        </p:txBody>
+      </p:sp>
+      <p:sp>
+        <p:nvSpPr>
+          <p:cNvPr id="39" name="TextBox 38"/>
+          <p:cNvSpPr txBox="1"/>
+          <p:nvPr/>
+        </p:nvSpPr>
+        <p:spPr>
+          <a:xfrm>
+            <a:off x="10180000" y="6890000"/>
+            <a:ext cx="1910000" cy="1344000"/>
+          </a:xfrm>
+          <a:prstGeom prst="rect">
+            <a:avLst/>
+          </a:prstGeom>
+          <a:noFill/>
+        </p:spPr>
+        <p:txBody>
+          <a:bodyPr wrap="square">
+            <a:spAutoFit/>
+          </a:bodyPr>
+          <a:lstStyle/>
+          <a:p>
+            <a:r>
+              <a:rPr sz="900" b="0"/>
+              <a:t>Предупреждение: точность ниже порога по FA или BIAS</a:t>
+            </a:r>
+          </a:p>
+          <a:p>
+            <a:r>
+              <a:rPr sz="900" b="0"/>
+              <a:t>Предупреждение: разрыв с ограниченным планом SNP</a:t>
+            </a:r>
+          </a:p>
+          <a:p>
+            <a:r>
+              <a:rPr sz="900" b="0"/>
+              <a:t>Предупреждение: прогноз без истории по новому DFU</a:t>
+            </a:r>
+          </a:p>
+          <a:p>
+            <a:r>
+              <a:rPr sz="900" b="0"/>
+              <a:t>Предупреждение: ручная корректировка без обоснования</a:t>
+            </a:r>
+          </a:p>
+        </p:txBody>
+      </p:sp>
+      <p:sp>
+        <p:nvSpPr>
+          <p:cNvPr id="40" name="Rectangle 39"/>
           <p:cNvSpPr/>
           <p:nvPr/>
         </p:nvSpPr>
         <p:spPr>
           <a:xfrm>
-            <a:off x="100000" y="980000"/>
-            <a:ext cx="1600000" cy="620000"/>
+            <a:off x="10180000" y="8384000"/>
+            <a:ext cx="1910000" cy="620000"/>
           </a:xfrm>
           <a:prstGeom prst="rect">
             <a:avLst/>
@@ -4659,20 +4724,20 @@
             <a:pPr algn="ctr"/>
             <a:r>
               <a:rPr sz="900"/>
-              <a:t>История продаж и заказы из ERP / DWH</a:t>
-            </a:r>
-          </a:p>
-        </p:txBody>
-      </p:sp>
-      <p:sp>
-        <p:nvSpPr>
-          <p:cNvPr id="40" name="Rectangle 39"/>
+              <a:t>Передача неограниченного плана спроса в SNP и MEIO</a:t>
+            </a:r>
+          </a:p>
+        </p:txBody>
+      </p:sp>
+      <p:sp>
+        <p:nvSpPr>
+          <p:cNvPr id="41" name="Rectangle 40"/>
           <p:cNvSpPr/>
           <p:nvPr/>
         </p:nvSpPr>
         <p:spPr>
           <a:xfrm>
-            <a:off x="100000" y="1677142"/>
+            <a:off x="100000" y="980000"/>
             <a:ext cx="1600000" cy="620000"/>
           </a:xfrm>
           <a:prstGeom prst="rect">
@@ -4703,20 +4768,20 @@
             <a:pPr algn="ctr"/>
             <a:r>
               <a:rPr sz="900"/>
-              <a:t>План производства собственной переработки из SNP и PS</a:t>
-            </a:r>
-          </a:p>
-        </p:txBody>
-      </p:sp>
-      <p:sp>
-        <p:nvSpPr>
-          <p:cNvPr id="41" name="Rectangle 40"/>
+              <a:t>История продаж и заказы из ERP / DWH</a:t>
+            </a:r>
+          </a:p>
+        </p:txBody>
+      </p:sp>
+      <p:sp>
+        <p:nvSpPr>
+          <p:cNvPr id="42" name="Rectangle 41"/>
           <p:cNvSpPr/>
           <p:nvPr/>
         </p:nvSpPr>
         <p:spPr>
           <a:xfrm>
-            <a:off x="100000" y="2374284"/>
+            <a:off x="100000" y="1793333"/>
             <a:ext cx="1600000" cy="620000"/>
           </a:xfrm>
           <a:prstGeom prst="rect">
@@ -4754,13 +4819,13 @@
       </p:sp>
       <p:sp>
         <p:nvSpPr>
-          <p:cNvPr id="42" name="Rectangle 41"/>
+          <p:cNvPr id="43" name="Rectangle 42"/>
           <p:cNvSpPr/>
           <p:nvPr/>
         </p:nvSpPr>
         <p:spPr>
           <a:xfrm>
-            <a:off x="100000" y="3071426"/>
+            <a:off x="100000" y="2606666"/>
             <a:ext cx="1600000" cy="620000"/>
           </a:xfrm>
           <a:prstGeom prst="rect">
@@ -4791,20 +4856,20 @@
             <a:pPr algn="ctr"/>
             <a:r>
               <a:rPr sz="900"/>
-              <a:t>Sell-Out и остатки клиента из ERP</a:t>
-            </a:r>
-          </a:p>
-        </p:txBody>
-      </p:sp>
-      <p:sp>
-        <p:nvSpPr>
-          <p:cNvPr id="43" name="Rectangle 42"/>
+              <a:t>Sell-Out, остатки и транзит клиента по EDI</a:t>
+            </a:r>
+          </a:p>
+        </p:txBody>
+      </p:sp>
+      <p:sp>
+        <p:nvSpPr>
+          <p:cNvPr id="44" name="Rectangle 43"/>
           <p:cNvSpPr/>
           <p:nvPr/>
         </p:nvSpPr>
         <p:spPr>
           <a:xfrm>
-            <a:off x="100000" y="3768568"/>
+            <a:off x="100000" y="3419999"/>
             <a:ext cx="1600000" cy="620000"/>
           </a:xfrm>
           <a:prstGeom prst="rect">
@@ -4835,20 +4900,20 @@
             <a:pPr algn="ctr"/>
             <a:r>
               <a:rPr sz="900"/>
-              <a:t>Открытые заказы и целевой запас клиента</a:t>
-            </a:r>
-          </a:p>
-        </p:txBody>
-      </p:sp>
-      <p:sp>
-        <p:nvSpPr>
-          <p:cNvPr id="44" name="Rectangle 43"/>
+              <a:t>Открытые заказы сетей и дистрибьюторов по EDI</a:t>
+            </a:r>
+          </a:p>
+        </p:txBody>
+      </p:sp>
+      <p:sp>
+        <p:nvSpPr>
+          <p:cNvPr id="45" name="Rectangle 44"/>
           <p:cNvSpPr/>
           <p:nvPr/>
         </p:nvSpPr>
         <p:spPr>
           <a:xfrm>
-            <a:off x="100000" y="4465710"/>
+            <a:off x="100000" y="4233332"/>
             <a:ext cx="1600000" cy="620000"/>
           </a:xfrm>
           <a:prstGeom prst="rect">
@@ -4879,20 +4944,20 @@
             <a:pPr algn="ctr"/>
             <a:r>
               <a:rPr sz="900"/>
-              <a:t>Категорийный менеджмент: проверка Building Blocks</a:t>
-            </a:r>
-          </a:p>
-        </p:txBody>
-      </p:sp>
-      <p:sp>
-        <p:nvSpPr>
-          <p:cNvPr id="45" name="Rectangle 44"/>
+              <a:t>Категорийный менеджмент: проверка BB</a:t>
+            </a:r>
+          </a:p>
+        </p:txBody>
+      </p:sp>
+      <p:sp>
+        <p:nvSpPr>
+          <p:cNvPr id="46" name="Rectangle 45"/>
           <p:cNvSpPr/>
           <p:nvPr/>
         </p:nvSpPr>
         <p:spPr>
           <a:xfrm>
-            <a:off x="100000" y="5162852"/>
+            <a:off x="100000" y="5046665"/>
             <a:ext cx="1600000" cy="620000"/>
           </a:xfrm>
           <a:prstGeom prst="rect">
@@ -4923,20 +4988,20 @@
             <a:pPr algn="ctr"/>
             <a:r>
               <a:rPr sz="900"/>
-              <a:t>Коммерческие финансы: консенсус-прогноз в деньгах</a:t>
-            </a:r>
-          </a:p>
-        </p:txBody>
-      </p:sp>
-      <p:sp>
-        <p:nvSpPr>
-          <p:cNvPr id="46" name="Rectangle 45"/>
+              <a:t>Коммерческие финансы: цены, оценка в деньгах</a:t>
+            </a:r>
+          </a:p>
+        </p:txBody>
+      </p:sp>
+      <p:sp>
+        <p:nvSpPr>
+          <p:cNvPr id="47" name="Rectangle 46"/>
           <p:cNvSpPr/>
           <p:nvPr/>
         </p:nvSpPr>
         <p:spPr>
           <a:xfrm>
-            <a:off x="100000" y="5859994"/>
+            <a:off x="100000" y="5859998"/>
             <a:ext cx="1600000" cy="620000"/>
           </a:xfrm>
           <a:prstGeom prst="rect">
@@ -4967,14 +5032,14 @@
             <a:pPr algn="ctr"/>
             <a:r>
               <a:rPr sz="900"/>
-              <a:t>Получение ограниченного прогноза из модуля SNP</a:t>
+              <a:t>Получение ограниченного плана из модуля SNP</a:t>
             </a:r>
           </a:p>
         </p:txBody>
       </p:sp>
       <p:cxnSp>
         <p:nvCxnSpPr>
-          <p:cNvPr id="47" name="Connector 46"/>
+          <p:cNvPr id="48" name="Connector 47"/>
           <p:cNvCxnSpPr>
             <a:stCxn id="4" idx="2"/>
             <a:endCxn id="6" idx="0"/>
@@ -4984,43 +5049,7 @@
         <p:spPr>
           <a:xfrm>
             <a:off x="2895000" y="1660000"/>
-            <a:ext cx="0" cy="1426000"/>
-          </a:xfrm>
-          <a:prstGeom prst="line">
-            <a:avLst/>
-          </a:prstGeom>
-          <a:ln>
-            <a:tailEnd type="triangle"/>
-          </a:ln>
-        </p:spPr>
-        <p:style>
-          <a:lnRef idx="2">
-            <a:schemeClr val="accent1"/>
-          </a:lnRef>
-          <a:fillRef idx="0">
-            <a:schemeClr val="accent1"/>
-          </a:fillRef>
-          <a:effectRef idx="1">
-            <a:schemeClr val="accent1"/>
-          </a:effectRef>
-          <a:fontRef idx="minor">
-            <a:schemeClr val="tx1"/>
-          </a:fontRef>
-        </p:style>
-      </p:cxnSp>
-      <p:cxnSp>
-        <p:nvCxnSpPr>
-          <p:cNvPr id="48" name="Connector 47"/>
-          <p:cNvCxnSpPr>
-            <a:stCxn id="6" idx="3"/>
-            <a:endCxn id="10" idx="1"/>
-          </p:cNvCxnSpPr>
-          <p:nvPr/>
-        </p:nvCxnSpPr>
-        <p:spPr>
-          <a:xfrm flipV="1">
-            <a:off x="3850000" y="1350000"/>
-            <a:ext cx="150000" cy="2046000"/>
+            <a:ext cx="0" cy="1594000"/>
           </a:xfrm>
           <a:prstGeom prst="line">
             <a:avLst/>
@@ -5048,15 +5077,15 @@
         <p:nvCxnSpPr>
           <p:cNvPr id="49" name="Connector 48"/>
           <p:cNvCxnSpPr>
-            <a:stCxn id="10" idx="2"/>
-            <a:endCxn id="12" idx="0"/>
+            <a:stCxn id="6" idx="0"/>
+            <a:endCxn id="10" idx="2"/>
           </p:cNvCxnSpPr>
           <p:nvPr/>
         </p:nvCxnSpPr>
         <p:spPr>
-          <a:xfrm>
-            <a:off x="4955000" y="1660000"/>
-            <a:ext cx="0" cy="922000"/>
+          <a:xfrm flipV="1">
+            <a:off x="2895000" y="1660000"/>
+            <a:ext cx="2060000" cy="1594000"/>
           </a:xfrm>
           <a:prstGeom prst="line">
             <a:avLst/>
@@ -5085,14 +5114,14 @@
           <p:cNvPr id="50" name="Connector 49"/>
           <p:cNvCxnSpPr>
             <a:stCxn id="10" idx="2"/>
-            <a:endCxn id="14" idx="0"/>
+            <a:endCxn id="12" idx="0"/>
           </p:cNvCxnSpPr>
           <p:nvPr/>
         </p:nvCxnSpPr>
         <p:spPr>
           <a:xfrm>
             <a:off x="4955000" y="1660000"/>
-            <a:ext cx="0" cy="2464000"/>
+            <a:ext cx="0" cy="1090000"/>
           </a:xfrm>
           <a:prstGeom prst="line">
             <a:avLst/>
@@ -5120,15 +5149,15 @@
         <p:nvCxnSpPr>
           <p:cNvPr id="51" name="Connector 50"/>
           <p:cNvCxnSpPr>
-            <a:stCxn id="12" idx="2"/>
-            <a:endCxn id="15" idx="0"/>
+            <a:stCxn id="10" idx="2"/>
+            <a:endCxn id="14" idx="0"/>
           </p:cNvCxnSpPr>
           <p:nvPr/>
         </p:nvCxnSpPr>
         <p:spPr>
           <a:xfrm>
-            <a:off x="4955000" y="3202000"/>
-            <a:ext cx="0" cy="1692000"/>
+            <a:off x="4955000" y="1660000"/>
+            <a:ext cx="0" cy="2632000"/>
           </a:xfrm>
           <a:prstGeom prst="line">
             <a:avLst/>
@@ -5156,15 +5185,15 @@
         <p:nvCxnSpPr>
           <p:cNvPr id="52" name="Connector 51"/>
           <p:cNvCxnSpPr>
-            <a:stCxn id="14" idx="2"/>
-            <a:endCxn id="15" idx="0"/>
+            <a:stCxn id="12" idx="2"/>
+            <a:endCxn id="16" idx="0"/>
           </p:cNvCxnSpPr>
           <p:nvPr/>
         </p:nvCxnSpPr>
         <p:spPr>
           <a:xfrm>
-            <a:off x="4955000" y="4744000"/>
-            <a:ext cx="0" cy="150000"/>
+            <a:off x="4955000" y="3370000"/>
+            <a:ext cx="0" cy="2464000"/>
           </a:xfrm>
           <a:prstGeom prst="line">
             <a:avLst/>
@@ -5192,15 +5221,15 @@
         <p:nvCxnSpPr>
           <p:cNvPr id="53" name="Connector 52"/>
           <p:cNvCxnSpPr>
-            <a:stCxn id="15" idx="0"/>
-            <a:endCxn id="19" idx="2"/>
+            <a:stCxn id="14" idx="2"/>
+            <a:endCxn id="16" idx="0"/>
           </p:cNvCxnSpPr>
           <p:nvPr/>
         </p:nvCxnSpPr>
         <p:spPr>
-          <a:xfrm flipV="1">
-            <a:off x="4955000" y="1660000"/>
-            <a:ext cx="2060000" cy="3234000"/>
+          <a:xfrm>
+            <a:off x="4955000" y="4912000"/>
+            <a:ext cx="0" cy="922000"/>
           </a:xfrm>
           <a:prstGeom prst="line">
             <a:avLst/>
@@ -5228,15 +5257,15 @@
         <p:nvCxnSpPr>
           <p:cNvPr id="54" name="Connector 53"/>
           <p:cNvCxnSpPr>
-            <a:stCxn id="15" idx="0"/>
-            <a:endCxn id="20" idx="2"/>
+            <a:stCxn id="16" idx="0"/>
+            <a:endCxn id="21" idx="2"/>
           </p:cNvCxnSpPr>
           <p:nvPr/>
         </p:nvCxnSpPr>
         <p:spPr>
           <a:xfrm flipV="1">
-            <a:off x="4955000" y="2430000"/>
-            <a:ext cx="2060000" cy="2464000"/>
+            <a:off x="4955000" y="1660000"/>
+            <a:ext cx="2060000" cy="4174000"/>
           </a:xfrm>
           <a:prstGeom prst="line">
             <a:avLst/>
@@ -5264,15 +5293,15 @@
         <p:nvCxnSpPr>
           <p:cNvPr id="55" name="Connector 54"/>
           <p:cNvCxnSpPr>
-            <a:stCxn id="19" idx="3"/>
-            <a:endCxn id="24" idx="1"/>
+            <a:stCxn id="16" idx="0"/>
+            <a:endCxn id="22" idx="2"/>
           </p:cNvCxnSpPr>
           <p:nvPr/>
         </p:nvCxnSpPr>
         <p:spPr>
-          <a:xfrm>
-            <a:off x="7970000" y="1350000"/>
-            <a:ext cx="150000" cy="0"/>
+          <a:xfrm flipV="1">
+            <a:off x="4955000" y="2430000"/>
+            <a:ext cx="2060000" cy="3404000"/>
           </a:xfrm>
           <a:prstGeom prst="line">
             <a:avLst/>
@@ -5300,15 +5329,15 @@
         <p:nvCxnSpPr>
           <p:cNvPr id="56" name="Connector 55"/>
           <p:cNvCxnSpPr>
-            <a:stCxn id="20" idx="3"/>
-            <a:endCxn id="24" idx="1"/>
+            <a:stCxn id="21" idx="3"/>
+            <a:endCxn id="26" idx="1"/>
           </p:cNvCxnSpPr>
           <p:nvPr/>
         </p:nvCxnSpPr>
         <p:spPr>
-          <a:xfrm flipV="1">
+          <a:xfrm>
             <a:off x="7970000" y="1350000"/>
-            <a:ext cx="150000" cy="770000"/>
+            <a:ext cx="150000" cy="0"/>
           </a:xfrm>
           <a:prstGeom prst="line">
             <a:avLst/>
@@ -5336,15 +5365,15 @@
         <p:nvCxnSpPr>
           <p:cNvPr id="57" name="Connector 56"/>
           <p:cNvCxnSpPr>
-            <a:stCxn id="24" idx="2"/>
-            <a:endCxn id="26" idx="0"/>
+            <a:stCxn id="22" idx="3"/>
+            <a:endCxn id="26" idx="1"/>
           </p:cNvCxnSpPr>
           <p:nvPr/>
         </p:nvCxnSpPr>
         <p:spPr>
-          <a:xfrm>
-            <a:off x="9075000" y="1660000"/>
-            <a:ext cx="0" cy="1090000"/>
+          <a:xfrm flipV="1">
+            <a:off x="7970000" y="1350000"/>
+            <a:ext cx="150000" cy="770000"/>
           </a:xfrm>
           <a:prstGeom prst="line">
             <a:avLst/>
@@ -5372,15 +5401,15 @@
         <p:nvCxnSpPr>
           <p:cNvPr id="58" name="Connector 57"/>
           <p:cNvCxnSpPr>
-            <a:stCxn id="26" idx="3"/>
-            <a:endCxn id="30" idx="1"/>
+            <a:stCxn id="26" idx="2"/>
+            <a:endCxn id="28" idx="0"/>
           </p:cNvCxnSpPr>
           <p:nvPr/>
         </p:nvCxnSpPr>
         <p:spPr>
-          <a:xfrm flipV="1">
-            <a:off x="10030000" y="1350000"/>
-            <a:ext cx="150000" cy="1710000"/>
+          <a:xfrm>
+            <a:off x="9075000" y="1660000"/>
+            <a:ext cx="0" cy="1426000"/>
           </a:xfrm>
           <a:prstGeom prst="line">
             <a:avLst/>
@@ -5408,15 +5437,15 @@
         <p:nvCxnSpPr>
           <p:cNvPr id="59" name="Connector 58"/>
           <p:cNvCxnSpPr>
-            <a:stCxn id="30" idx="2"/>
-            <a:endCxn id="32" idx="0"/>
+            <a:stCxn id="28" idx="3"/>
+            <a:endCxn id="32" idx="1"/>
           </p:cNvCxnSpPr>
           <p:nvPr/>
         </p:nvCxnSpPr>
         <p:spPr>
-          <a:xfrm>
-            <a:off x="11135000" y="1660000"/>
-            <a:ext cx="0" cy="754000"/>
+          <a:xfrm flipV="1">
+            <a:off x="10030000" y="1350000"/>
+            <a:ext cx="150000" cy="2046000"/>
           </a:xfrm>
           <a:prstGeom prst="line">
             <a:avLst/>
@@ -5444,7 +5473,7 @@
         <p:nvCxnSpPr>
           <p:cNvPr id="60" name="Connector 59"/>
           <p:cNvCxnSpPr>
-            <a:stCxn id="30" idx="2"/>
+            <a:stCxn id="32" idx="2"/>
             <a:endCxn id="34" idx="0"/>
           </p:cNvCxnSpPr>
           <p:nvPr/>
@@ -5452,7 +5481,7 @@
         <p:spPr>
           <a:xfrm>
             <a:off x="11135000" y="1660000"/>
-            <a:ext cx="0" cy="2296000"/>
+            <a:ext cx="0" cy="922000"/>
           </a:xfrm>
           <a:prstGeom prst="line">
             <a:avLst/>
@@ -5480,17 +5509,17 @@
         <p:nvCxnSpPr>
           <p:cNvPr id="61" name="Connector 60"/>
           <p:cNvCxnSpPr>
-            <a:stCxn id="34" idx="1"/>
-            <a:endCxn id="10" idx="3"/>
+            <a:stCxn id="32" idx="2"/>
+            <a:endCxn id="36" idx="0"/>
           </p:cNvCxnSpPr>
           <p:nvPr/>
         </p:nvCxnSpPr>
         <p:spPr>
-          <a:xfrm flipH="1" flipV="1">
-            <a:off x="5910000" y="1350000"/>
-            <a:ext cx="4270000" cy="2916000"/>
-          </a:xfrm>
-          <a:prstGeom prst="bentConnector3">
+          <a:xfrm>
+            <a:off x="11135000" y="1660000"/>
+            <a:ext cx="0" cy="2464000"/>
+          </a:xfrm>
+          <a:prstGeom prst="line">
             <a:avLst/>
           </a:prstGeom>
           <a:ln>
@@ -5516,17 +5545,17 @@
         <p:nvCxnSpPr>
           <p:cNvPr id="62" name="Connector 61"/>
           <p:cNvCxnSpPr>
-            <a:stCxn id="34" idx="2"/>
-            <a:endCxn id="36" idx="0"/>
+            <a:stCxn id="36" idx="1"/>
+            <a:endCxn id="10" idx="3"/>
           </p:cNvCxnSpPr>
           <p:nvPr/>
         </p:nvCxnSpPr>
         <p:spPr>
-          <a:xfrm>
-            <a:off x="11135000" y="4576000"/>
-            <a:ext cx="0" cy="1258000"/>
-          </a:xfrm>
-          <a:prstGeom prst="line">
+          <a:xfrm flipH="1" flipV="1">
+            <a:off x="5910000" y="1350000"/>
+            <a:ext cx="4270000" cy="3084000"/>
+          </a:xfrm>
+          <a:prstGeom prst="bentConnector3">
             <a:avLst/>
           </a:prstGeom>
           <a:ln>
@@ -5552,15 +5581,15 @@
         <p:nvCxnSpPr>
           <p:cNvPr id="63" name="Connector 62"/>
           <p:cNvCxnSpPr>
-            <a:stCxn id="39" idx="3"/>
-            <a:endCxn id="4" idx="1"/>
+            <a:stCxn id="36" idx="2"/>
+            <a:endCxn id="38" idx="0"/>
           </p:cNvCxnSpPr>
           <p:nvPr/>
         </p:nvCxnSpPr>
         <p:spPr>
           <a:xfrm>
-            <a:off x="1700000" y="1290000"/>
-            <a:ext cx="240000" cy="60000"/>
+            <a:off x="11135000" y="4744000"/>
+            <a:ext cx="0" cy="1426000"/>
           </a:xfrm>
           <a:prstGeom prst="line">
             <a:avLst/>
@@ -5588,15 +5617,15 @@
         <p:nvCxnSpPr>
           <p:cNvPr id="64" name="Connector 63"/>
           <p:cNvCxnSpPr>
-            <a:stCxn id="40" idx="3"/>
-            <a:endCxn id="6" idx="1"/>
+            <a:stCxn id="41" idx="3"/>
+            <a:endCxn id="4" idx="1"/>
           </p:cNvCxnSpPr>
           <p:nvPr/>
         </p:nvCxnSpPr>
         <p:spPr>
           <a:xfrm>
-            <a:off x="1700000" y="1987142"/>
-            <a:ext cx="240000" cy="1408858"/>
+            <a:off x="1700000" y="1290000"/>
+            <a:ext cx="240000" cy="60000"/>
           </a:xfrm>
           <a:prstGeom prst="line">
             <a:avLst/>
@@ -5624,15 +5653,15 @@
         <p:nvCxnSpPr>
           <p:cNvPr id="65" name="Connector 64"/>
           <p:cNvCxnSpPr>
-            <a:stCxn id="41" idx="3"/>
-            <a:endCxn id="15" idx="1"/>
+            <a:stCxn id="42" idx="3"/>
+            <a:endCxn id="16" idx="1"/>
           </p:cNvCxnSpPr>
           <p:nvPr/>
         </p:nvCxnSpPr>
         <p:spPr>
           <a:xfrm>
-            <a:off x="1700000" y="2684284"/>
-            <a:ext cx="2300000" cy="2519716"/>
+            <a:off x="1700000" y="2103333"/>
+            <a:ext cx="2300000" cy="4040667"/>
           </a:xfrm>
           <a:prstGeom prst="bentConnector3">
             <a:avLst/>
@@ -5660,17 +5689,17 @@
         <p:nvCxnSpPr>
           <p:cNvPr id="66" name="Connector 65"/>
           <p:cNvCxnSpPr>
-            <a:stCxn id="42" idx="3"/>
-            <a:endCxn id="20" idx="1"/>
+            <a:stCxn id="12" idx="2"/>
+            <a:endCxn id="18" idx="0"/>
           </p:cNvCxnSpPr>
           <p:nvPr/>
         </p:nvCxnSpPr>
         <p:spPr>
-          <a:xfrm flipV="1">
-            <a:off x="1700000" y="2120000"/>
-            <a:ext cx="4360000" cy="1261426"/>
-          </a:xfrm>
-          <a:prstGeom prst="bentConnector3">
+          <a:xfrm>
+            <a:off x="4955000" y="3370000"/>
+            <a:ext cx="0" cy="4006000"/>
+          </a:xfrm>
+          <a:prstGeom prst="line">
             <a:avLst/>
           </a:prstGeom>
           <a:ln>
@@ -5697,14 +5726,14 @@
           <p:cNvPr id="67" name="Connector 66"/>
           <p:cNvCxnSpPr>
             <a:stCxn id="43" idx="3"/>
-            <a:endCxn id="20" idx="1"/>
+            <a:endCxn id="22" idx="1"/>
           </p:cNvCxnSpPr>
           <p:nvPr/>
         </p:nvCxnSpPr>
         <p:spPr>
           <a:xfrm flipV="1">
             <a:off x="1700000" y="2120000"/>
-            <a:ext cx="4360000" cy="1958568"/>
+            <a:ext cx="4360000" cy="796666"/>
           </a:xfrm>
           <a:prstGeom prst="bentConnector3">
             <a:avLst/>
@@ -5733,14 +5762,14 @@
           <p:cNvPr id="68" name="Connector 67"/>
           <p:cNvCxnSpPr>
             <a:stCxn id="44" idx="3"/>
-            <a:endCxn id="24" idx="1"/>
+            <a:endCxn id="22" idx="1"/>
           </p:cNvCxnSpPr>
           <p:nvPr/>
         </p:nvCxnSpPr>
         <p:spPr>
           <a:xfrm flipV="1">
-            <a:off x="1700000" y="1350000"/>
-            <a:ext cx="6420000" cy="3425710"/>
+            <a:off x="1700000" y="2120000"/>
+            <a:ext cx="4360000" cy="1609999"/>
           </a:xfrm>
           <a:prstGeom prst="bentConnector3">
             <a:avLst/>
@@ -5775,8 +5804,8 @@
         </p:nvCxnSpPr>
         <p:spPr>
           <a:xfrm flipV="1">
-            <a:off x="1700000" y="3060000"/>
-            <a:ext cx="6420000" cy="2412852"/>
+            <a:off x="1700000" y="1350000"/>
+            <a:ext cx="6420000" cy="3193332"/>
           </a:xfrm>
           <a:prstGeom prst="bentConnector3">
             <a:avLst/>
@@ -5805,14 +5834,14 @@
           <p:cNvPr id="70" name="Connector 69"/>
           <p:cNvCxnSpPr>
             <a:stCxn id="46" idx="3"/>
-            <a:endCxn id="32" idx="1"/>
+            <a:endCxn id="28" idx="1"/>
           </p:cNvCxnSpPr>
           <p:nvPr/>
         </p:nvCxnSpPr>
         <p:spPr>
           <a:xfrm flipV="1">
-            <a:off x="1700000" y="2724000"/>
-            <a:ext cx="8480000" cy="3445994"/>
+            <a:off x="1700000" y="3396000"/>
+            <a:ext cx="6420000" cy="1960665"/>
           </a:xfrm>
           <a:prstGeom prst="bentConnector3">
             <a:avLst/>
@@ -5840,15 +5869,51 @@
         <p:nvCxnSpPr>
           <p:cNvPr id="71" name="Connector 70"/>
           <p:cNvCxnSpPr>
-            <a:stCxn id="30" idx="2"/>
-            <a:endCxn id="38" idx="0"/>
+            <a:stCxn id="47" idx="3"/>
+            <a:endCxn id="34" idx="1"/>
           </p:cNvCxnSpPr>
           <p:nvPr/>
         </p:nvCxnSpPr>
         <p:spPr>
+          <a:xfrm flipV="1">
+            <a:off x="1700000" y="2892000"/>
+            <a:ext cx="8480000" cy="3277998"/>
+          </a:xfrm>
+          <a:prstGeom prst="bentConnector3">
+            <a:avLst/>
+          </a:prstGeom>
+          <a:ln>
+            <a:tailEnd type="triangle"/>
+          </a:ln>
+        </p:spPr>
+        <p:style>
+          <a:lnRef idx="2">
+            <a:schemeClr val="accent1"/>
+          </a:lnRef>
+          <a:fillRef idx="0">
+            <a:schemeClr val="accent1"/>
+          </a:fillRef>
+          <a:effectRef idx="1">
+            <a:schemeClr val="accent1"/>
+          </a:effectRef>
+          <a:fontRef idx="minor">
+            <a:schemeClr val="tx1"/>
+          </a:fontRef>
+        </p:style>
+      </p:cxnSp>
+      <p:cxnSp>
+        <p:nvCxnSpPr>
+          <p:cNvPr id="72" name="Connector 71"/>
+          <p:cNvCxnSpPr>
+            <a:stCxn id="32" idx="2"/>
+            <a:endCxn id="40" idx="0"/>
+          </p:cNvCxnSpPr>
+          <p:nvPr/>
+        </p:nvCxnSpPr>
+        <p:spPr>
           <a:xfrm>
             <a:off x="11135000" y="1660000"/>
-            <a:ext cx="0" cy="6388000"/>
+            <a:ext cx="0" cy="6724000"/>
           </a:xfrm>
           <a:prstGeom prst="line">
             <a:avLst/>

--- a/In.Plan DP process 06-09-2026.pptx
+++ b/In.Plan DP process 06-09-2026.pptx
@@ -7,7 +7,7 @@
   <p:sldIdLst>
     <p:sldId id="256" r:id="rId7"/>
   </p:sldIdLst>
-  <p:sldSz cx="12192000" cy="7080000" type="screen4x3"/>
+  <p:sldSz cx="12192000" cy="7580000" type="screen4x3"/>
   <p:notesSz cx="6858000" cy="9144000"/>
   <p:defaultTextStyle>
     <a:defPPr>
@@ -3097,7 +3097,7 @@
         <p:spPr>
           <a:xfrm>
             <a:off x="1880000" y="980000"/>
-            <a:ext cx="2030000" cy="6000000"/>
+            <a:ext cx="2030000" cy="6500000"/>
           </a:xfrm>
           <a:prstGeom prst="rect">
             <a:avLst/>
@@ -3244,7 +3244,7 @@
           <a:p>
             <a:r>
               <a:rPr sz="900" b="0"/>
-              <a:t>Блокировка запуска расчёта при отказе</a:t>
+              <a:t>Критическая ошибка — стоп, локальная — карантин рядов</a:t>
             </a:r>
           </a:p>
         </p:txBody>
@@ -3349,7 +3349,7 @@
         <p:spPr>
           <a:xfrm>
             <a:off x="3940000" y="980000"/>
-            <a:ext cx="2030000" cy="6000000"/>
+            <a:ext cx="2030000" cy="6500000"/>
           </a:xfrm>
           <a:prstGeom prst="rect">
             <a:avLst/>
@@ -3554,7 +3554,7 @@
         <p:spPr>
           <a:xfrm>
             <a:off x="4000000" y="3470000"/>
-            <a:ext cx="1910000" cy="672000"/>
+            <a:ext cx="1910000" cy="1008000"/>
           </a:xfrm>
           <a:prstGeom prst="rect">
             <a:avLst/>
@@ -3584,6 +3584,12 @@
               <a:t>Запуск по настройкам сегмента и расписанию</a:t>
             </a:r>
           </a:p>
+          <a:p>
+            <a:r>
+              <a:rPr sz="900" b="0"/>
+              <a:t>Ассортимент на период прогноза: запуски и выводы</a:t>
+            </a:r>
+          </a:p>
         </p:txBody>
       </p:sp>
       <p:sp>
@@ -3594,7 +3600,7 @@
         </p:nvSpPr>
         <p:spPr>
           <a:xfrm>
-            <a:off x="4000000" y="4292000"/>
+            <a:off x="4000000" y="4628000"/>
             <a:ext cx="1910000" cy="620000"/>
           </a:xfrm>
           <a:prstGeom prst="roundRect">
@@ -3638,7 +3644,7 @@
         </p:nvSpPr>
         <p:spPr>
           <a:xfrm>
-            <a:off x="4000000" y="5012000"/>
+            <a:off x="4000000" y="5348000"/>
             <a:ext cx="1910000" cy="672000"/>
           </a:xfrm>
           <a:prstGeom prst="rect">
@@ -3679,7 +3685,7 @@
         </p:nvSpPr>
         <p:spPr>
           <a:xfrm>
-            <a:off x="4000000" y="5834000"/>
+            <a:off x="4000000" y="6170000"/>
             <a:ext cx="1910000" cy="620000"/>
           </a:xfrm>
           <a:prstGeom prst="roundRect">
@@ -3723,7 +3729,7 @@
         </p:nvSpPr>
         <p:spPr>
           <a:xfrm>
-            <a:off x="4000000" y="6554000"/>
+            <a:off x="4000000" y="6890000"/>
             <a:ext cx="1910000" cy="672000"/>
           </a:xfrm>
           <a:prstGeom prst="rect">
@@ -3764,7 +3770,7 @@
         </p:nvSpPr>
         <p:spPr>
           <a:xfrm>
-            <a:off x="4000000" y="7376000"/>
+            <a:off x="4000000" y="7712000"/>
             <a:ext cx="1910000" cy="620000"/>
           </a:xfrm>
           <a:prstGeom prst="rect">
@@ -3809,7 +3815,7 @@
         <p:spPr>
           <a:xfrm>
             <a:off x="6000000" y="980000"/>
-            <a:ext cx="2030000" cy="6000000"/>
+            <a:ext cx="2030000" cy="6500000"/>
           </a:xfrm>
           <a:prstGeom prst="rect">
             <a:avLst/>
@@ -3916,13 +3922,42 @@
       </p:sp>
       <p:sp>
         <p:nvSpPr>
-          <p:cNvPr id="22" name="Rounded Rectangle 21"/>
+          <p:cNvPr id="22" name="TextBox 21"/>
+          <p:cNvSpPr txBox="1"/>
+          <p:nvPr/>
+        </p:nvSpPr>
+        <p:spPr>
+          <a:xfrm>
+            <a:off x="6060000" y="1760000"/>
+            <a:ext cx="1910000" cy="336000"/>
+          </a:xfrm>
+          <a:prstGeom prst="rect">
+            <a:avLst/>
+          </a:prstGeom>
+          <a:noFill/>
+        </p:spPr>
+        <p:txBody>
+          <a:bodyPr wrap="square">
+            <a:spAutoFit/>
+          </a:bodyPr>
+          <a:lstStyle/>
+          <a:p>
+            <a:r>
+              <a:rPr sz="900" b="0"/>
+              <a:t>Маршрут клиента — по модели канала</a:t>
+            </a:r>
+          </a:p>
+        </p:txBody>
+      </p:sp>
+      <p:sp>
+        <p:nvSpPr>
+          <p:cNvPr id="23" name="Rounded Rectangle 22"/>
           <p:cNvSpPr/>
           <p:nvPr/>
         </p:nvSpPr>
         <p:spPr>
           <a:xfrm>
-            <a:off x="6060000" y="1810000"/>
+            <a:off x="6060000" y="2246000"/>
             <a:ext cx="1910000" cy="620000"/>
           </a:xfrm>
           <a:prstGeom prst="roundRect">
@@ -3960,13 +3995,13 @@
       </p:sp>
       <p:sp>
         <p:nvSpPr>
-          <p:cNvPr id="23" name="TextBox 22"/>
+          <p:cNvPr id="24" name="TextBox 23"/>
           <p:cNvSpPr txBox="1"/>
           <p:nvPr/>
         </p:nvSpPr>
         <p:spPr>
           <a:xfrm>
-            <a:off x="6060000" y="2530000"/>
+            <a:off x="6060000" y="2966000"/>
             <a:ext cx="1910000" cy="672000"/>
           </a:xfrm>
           <a:prstGeom prst="rect">
@@ -3995,14 +4030,14 @@
       </p:sp>
       <p:sp>
         <p:nvSpPr>
-          <p:cNvPr id="24" name="Rectangle 23"/>
+          <p:cNvPr id="25" name="Rectangle 24"/>
           <p:cNvSpPr/>
           <p:nvPr/>
         </p:nvSpPr>
         <p:spPr>
           <a:xfrm>
             <a:off x="8060000" y="980000"/>
-            <a:ext cx="2030000" cy="6000000"/>
+            <a:ext cx="2030000" cy="6500000"/>
           </a:xfrm>
           <a:prstGeom prst="rect">
             <a:avLst/>
@@ -4036,7 +4071,7 @@
       </p:sp>
       <p:sp>
         <p:nvSpPr>
-          <p:cNvPr id="25" name="TextBox 24"/>
+          <p:cNvPr id="26" name="TextBox 25"/>
           <p:cNvSpPr txBox="1"/>
           <p:nvPr/>
         </p:nvSpPr>
@@ -4065,7 +4100,7 @@
       </p:sp>
       <p:sp>
         <p:nvSpPr>
-          <p:cNvPr id="26" name="Rounded Rectangle 25"/>
+          <p:cNvPr id="27" name="Rounded Rectangle 26"/>
           <p:cNvSpPr/>
           <p:nvPr/>
         </p:nvSpPr>
@@ -4109,7 +4144,7 @@
       </p:sp>
       <p:sp>
         <p:nvSpPr>
-          <p:cNvPr id="27" name="TextBox 26"/>
+          <p:cNvPr id="28" name="TextBox 27"/>
           <p:cNvSpPr txBox="1"/>
           <p:nvPr/>
         </p:nvSpPr>
@@ -4156,7 +4191,7 @@
       </p:sp>
       <p:sp>
         <p:nvSpPr>
-          <p:cNvPr id="28" name="Rounded Rectangle 27"/>
+          <p:cNvPr id="29" name="Rounded Rectangle 28"/>
           <p:cNvSpPr/>
           <p:nvPr/>
         </p:nvSpPr>
@@ -4200,14 +4235,14 @@
       </p:sp>
       <p:sp>
         <p:nvSpPr>
-          <p:cNvPr id="29" name="TextBox 28"/>
+          <p:cNvPr id="30" name="TextBox 29"/>
           <p:cNvSpPr txBox="1"/>
           <p:nvPr/>
         </p:nvSpPr>
         <p:spPr>
           <a:xfrm>
             <a:off x="8120000" y="3806000"/>
-            <a:ext cx="1910000" cy="1008000"/>
+            <a:ext cx="1910000" cy="1176000"/>
           </a:xfrm>
           <a:prstGeom prst="rect">
             <a:avLst/>
@@ -4228,6 +4263,12 @@
           <a:p>
             <a:r>
               <a:rPr sz="900" b="0"/>
+              <a:t>Коммерческие допущения Sales/KAM</a:t>
+            </a:r>
+          </a:p>
+          <a:p>
+            <a:r>
+              <a:rPr sz="900" b="0"/>
               <a:t>Консенсус в объёме и в деньгах</a:t>
             </a:r>
           </a:p>
@@ -4240,27 +4281,27 @@
           <a:p>
             <a:r>
               <a:rPr sz="900" b="0"/>
-              <a:t>Согласование исключений</a:t>
+              <a:t>Решения по расхождениям и исключениям</a:t>
             </a:r>
           </a:p>
           <a:p>
             <a:r>
               <a:rPr sz="900" b="0"/>
-              <a:t>Согласованный план спроса Sell-In</a:t>
-            </a:r>
-          </a:p>
-        </p:txBody>
-      </p:sp>
-      <p:sp>
-        <p:nvSpPr>
-          <p:cNvPr id="30" name="Rectangle 29"/>
+              <a:t>Утверждение версии плана</a:t>
+            </a:r>
+          </a:p>
+        </p:txBody>
+      </p:sp>
+      <p:sp>
+        <p:nvSpPr>
+          <p:cNvPr id="31" name="Rectangle 30"/>
           <p:cNvSpPr/>
           <p:nvPr/>
         </p:nvSpPr>
         <p:spPr>
           <a:xfrm>
             <a:off x="10120000" y="980000"/>
-            <a:ext cx="2030000" cy="6000000"/>
+            <a:ext cx="2030000" cy="6500000"/>
           </a:xfrm>
           <a:prstGeom prst="rect">
             <a:avLst/>
@@ -4294,7 +4335,7 @@
       </p:sp>
       <p:sp>
         <p:nvSpPr>
-          <p:cNvPr id="31" name="TextBox 30"/>
+          <p:cNvPr id="32" name="TextBox 31"/>
           <p:cNvSpPr txBox="1"/>
           <p:nvPr/>
         </p:nvSpPr>
@@ -4323,7 +4364,7 @@
       </p:sp>
       <p:sp>
         <p:nvSpPr>
-          <p:cNvPr id="32" name="Rounded Rectangle 31"/>
+          <p:cNvPr id="33" name="Rounded Rectangle 32"/>
           <p:cNvSpPr/>
           <p:nvPr/>
         </p:nvSpPr>
@@ -4367,14 +4408,14 @@
       </p:sp>
       <p:sp>
         <p:nvSpPr>
-          <p:cNvPr id="33" name="TextBox 32"/>
+          <p:cNvPr id="34" name="TextBox 33"/>
           <p:cNvSpPr txBox="1"/>
           <p:nvPr/>
         </p:nvSpPr>
         <p:spPr>
           <a:xfrm>
             <a:off x="10180000" y="1760000"/>
-            <a:ext cx="1910000" cy="672000"/>
+            <a:ext cx="1910000" cy="1008000"/>
           </a:xfrm>
           <a:prstGeom prst="rect">
             <a:avLst/>
@@ -4410,17 +4451,23 @@
               <a:t>Архив прогнозов по лагам</a:t>
             </a:r>
           </a:p>
-        </p:txBody>
-      </p:sp>
-      <p:sp>
-        <p:nvSpPr>
-          <p:cNvPr id="34" name="Rounded Rectangle 33"/>
+          <a:p>
+            <a:r>
+              <a:rPr sz="900" b="0"/>
+              <a:t>Без вычета заказов: поглощение — в SNP</a:t>
+            </a:r>
+          </a:p>
+        </p:txBody>
+      </p:sp>
+      <p:sp>
+        <p:nvSpPr>
+          <p:cNvPr id="35" name="Rounded Rectangle 34"/>
           <p:cNvSpPr/>
           <p:nvPr/>
         </p:nvSpPr>
         <p:spPr>
           <a:xfrm>
-            <a:off x="10180000" y="2582000"/>
+            <a:off x="10180000" y="2918000"/>
             <a:ext cx="1910000" cy="620000"/>
           </a:xfrm>
           <a:prstGeom prst="roundRect">
@@ -4458,14 +4505,14 @@
       </p:sp>
       <p:sp>
         <p:nvSpPr>
-          <p:cNvPr id="35" name="TextBox 34"/>
+          <p:cNvPr id="36" name="TextBox 35"/>
           <p:cNvSpPr txBox="1"/>
           <p:nvPr/>
         </p:nvSpPr>
         <p:spPr>
           <a:xfrm>
-            <a:off x="10180000" y="3302000"/>
-            <a:ext cx="1910000" cy="672000"/>
+            <a:off x="10180000" y="3638000"/>
+            <a:ext cx="1910000" cy="1176000"/>
           </a:xfrm>
           <a:prstGeom prst="rect">
             <a:avLst/>
@@ -4492,26 +4539,32 @@
           <a:p>
             <a:r>
               <a:rPr sz="900" b="0"/>
-              <a:t>Приоритизация клиентов и SKU</a:t>
+              <a:t>Варианты закрытия разрыва от Supply</a:t>
             </a:r>
           </a:p>
           <a:p>
             <a:r>
               <a:rPr sz="900" b="0"/>
-              <a:t>Решение по разрыву</a:t>
-            </a:r>
-          </a:p>
-        </p:txBody>
-      </p:sp>
-      <p:sp>
-        <p:nvSpPr>
-          <p:cNvPr id="36" name="Rounded Rectangle 35"/>
+              <a:t>Подтверждение коммерческих изменений Sales/Marketing</a:t>
+            </a:r>
+          </a:p>
+          <a:p>
+            <a:r>
+              <a:rPr sz="900" b="0"/>
+              <a:t>Неразрешённое — на S&amp;OP</a:t>
+            </a:r>
+          </a:p>
+        </p:txBody>
+      </p:sp>
+      <p:sp>
+        <p:nvSpPr>
+          <p:cNvPr id="37" name="Rounded Rectangle 36"/>
           <p:cNvSpPr/>
           <p:nvPr/>
         </p:nvSpPr>
         <p:spPr>
           <a:xfrm>
-            <a:off x="10180000" y="4124000"/>
+            <a:off x="10180000" y="4964000"/>
             <a:ext cx="1910000" cy="620000"/>
           </a:xfrm>
           <a:prstGeom prst="roundRect">
@@ -4549,13 +4602,13 @@
       </p:sp>
       <p:sp>
         <p:nvSpPr>
-          <p:cNvPr id="37" name="TextBox 36"/>
+          <p:cNvPr id="38" name="TextBox 37"/>
           <p:cNvSpPr txBox="1"/>
           <p:nvPr/>
         </p:nvSpPr>
         <p:spPr>
           <a:xfrm>
-            <a:off x="10180000" y="4844000"/>
+            <a:off x="10180000" y="5684000"/>
             <a:ext cx="1910000" cy="1176000"/>
           </a:xfrm>
           <a:prstGeom prst="rect">
@@ -4577,7 +4630,7 @@
           <a:p>
             <a:r>
               <a:rPr sz="900" b="0"/>
-              <a:t>FVA: наивный → статистика → Building Blocks → консенсус</a:t>
+              <a:t>FVA: наивный → модельный → с эффектами → BB → консенсус</a:t>
             </a:r>
           </a:p>
           <a:p>
@@ -4596,13 +4649,13 @@
       </p:sp>
       <p:sp>
         <p:nvSpPr>
-          <p:cNvPr id="38" name="Rounded Rectangle 37"/>
+          <p:cNvPr id="39" name="Rounded Rectangle 38"/>
           <p:cNvSpPr/>
           <p:nvPr/>
         </p:nvSpPr>
         <p:spPr>
           <a:xfrm>
-            <a:off x="10180000" y="6170000"/>
+            <a:off x="10180000" y="7010000"/>
             <a:ext cx="1910000" cy="620000"/>
           </a:xfrm>
           <a:prstGeom prst="roundRect">
@@ -4640,13 +4693,13 @@
       </p:sp>
       <p:sp>
         <p:nvSpPr>
-          <p:cNvPr id="39" name="TextBox 38"/>
+          <p:cNvPr id="40" name="TextBox 39"/>
           <p:cNvSpPr txBox="1"/>
           <p:nvPr/>
         </p:nvSpPr>
         <p:spPr>
           <a:xfrm>
-            <a:off x="10180000" y="6890000"/>
+            <a:off x="10180000" y="7730000"/>
             <a:ext cx="1910000" cy="1344000"/>
           </a:xfrm>
           <a:prstGeom prst="rect">
@@ -4687,13 +4740,13 @@
       </p:sp>
       <p:sp>
         <p:nvSpPr>
-          <p:cNvPr id="40" name="Rectangle 39"/>
+          <p:cNvPr id="41" name="Rectangle 40"/>
           <p:cNvSpPr/>
           <p:nvPr/>
         </p:nvSpPr>
         <p:spPr>
           <a:xfrm>
-            <a:off x="10180000" y="8384000"/>
+            <a:off x="10180000" y="9224000"/>
             <a:ext cx="1910000" cy="620000"/>
           </a:xfrm>
           <a:prstGeom prst="rect">
@@ -4731,14 +4784,14 @@
       </p:sp>
       <p:sp>
         <p:nvSpPr>
-          <p:cNvPr id="41" name="Rectangle 40"/>
+          <p:cNvPr id="42" name="Rectangle 41"/>
           <p:cNvSpPr/>
           <p:nvPr/>
         </p:nvSpPr>
         <p:spPr>
           <a:xfrm>
-            <a:off x="100000" y="980000"/>
-            <a:ext cx="1600000" cy="620000"/>
+            <a:off x="10180000" y="9994000"/>
+            <a:ext cx="1910000" cy="620000"/>
           </a:xfrm>
           <a:prstGeom prst="rect">
             <a:avLst/>
@@ -4768,20 +4821,20 @@
             <a:pPr algn="ctr"/>
             <a:r>
               <a:rPr sz="900"/>
-              <a:t>История продаж и заказы из ERP / DWH</a:t>
-            </a:r>
-          </a:p>
-        </p:txBody>
-      </p:sp>
-      <p:sp>
-        <p:nvSpPr>
-          <p:cNvPr id="42" name="Rectangle 41"/>
+              <a:t>Ошибка прогноза по горизонту в MEIO</a:t>
+            </a:r>
+          </a:p>
+        </p:txBody>
+      </p:sp>
+      <p:sp>
+        <p:nvSpPr>
+          <p:cNvPr id="43" name="Rectangle 42"/>
           <p:cNvSpPr/>
           <p:nvPr/>
         </p:nvSpPr>
         <p:spPr>
           <a:xfrm>
-            <a:off x="100000" y="1793333"/>
+            <a:off x="100000" y="980000"/>
             <a:ext cx="1600000" cy="620000"/>
           </a:xfrm>
           <a:prstGeom prst="rect">
@@ -4812,20 +4865,20 @@
             <a:pPr algn="ctr"/>
             <a:r>
               <a:rPr sz="900"/>
-              <a:t>Промо-план из TPM/NRM</a:t>
-            </a:r>
-          </a:p>
-        </p:txBody>
-      </p:sp>
-      <p:sp>
-        <p:nvSpPr>
-          <p:cNvPr id="43" name="Rectangle 42"/>
+              <a:t>История продаж и заказы из ERP / DWH</a:t>
+            </a:r>
+          </a:p>
+        </p:txBody>
+      </p:sp>
+      <p:sp>
+        <p:nvSpPr>
+          <p:cNvPr id="44" name="Rectangle 43"/>
           <p:cNvSpPr/>
           <p:nvPr/>
         </p:nvSpPr>
         <p:spPr>
           <a:xfrm>
-            <a:off x="100000" y="2606666"/>
+            <a:off x="100000" y="1677142"/>
             <a:ext cx="1600000" cy="620000"/>
           </a:xfrm>
           <a:prstGeom prst="rect">
@@ -4856,20 +4909,20 @@
             <a:pPr algn="ctr"/>
             <a:r>
               <a:rPr sz="900"/>
-              <a:t>Sell-Out, остатки и транзит клиента по EDI</a:t>
-            </a:r>
-          </a:p>
-        </p:txBody>
-      </p:sp>
-      <p:sp>
-        <p:nvSpPr>
-          <p:cNvPr id="44" name="Rectangle 43"/>
+              <a:t>Промо-план из TPM/NRM</a:t>
+            </a:r>
+          </a:p>
+        </p:txBody>
+      </p:sp>
+      <p:sp>
+        <p:nvSpPr>
+          <p:cNvPr id="45" name="Rectangle 44"/>
           <p:cNvSpPr/>
           <p:nvPr/>
         </p:nvSpPr>
         <p:spPr>
           <a:xfrm>
-            <a:off x="100000" y="3419999"/>
+            <a:off x="100000" y="2374284"/>
             <a:ext cx="1600000" cy="620000"/>
           </a:xfrm>
           <a:prstGeom prst="rect">
@@ -4900,20 +4953,20 @@
             <a:pPr algn="ctr"/>
             <a:r>
               <a:rPr sz="900"/>
-              <a:t>Открытые заказы сетей и дистрибьюторов по EDI</a:t>
-            </a:r>
-          </a:p>
-        </p:txBody>
-      </p:sp>
-      <p:sp>
-        <p:nvSpPr>
-          <p:cNvPr id="45" name="Rectangle 44"/>
+              <a:t>Sell-Out, остатки и транзит клиента по EDI</a:t>
+            </a:r>
+          </a:p>
+        </p:txBody>
+      </p:sp>
+      <p:sp>
+        <p:nvSpPr>
+          <p:cNvPr id="46" name="Rectangle 45"/>
           <p:cNvSpPr/>
           <p:nvPr/>
         </p:nvSpPr>
         <p:spPr>
           <a:xfrm>
-            <a:off x="100000" y="4233332"/>
+            <a:off x="100000" y="3071426"/>
             <a:ext cx="1600000" cy="620000"/>
           </a:xfrm>
           <a:prstGeom prst="rect">
@@ -4944,20 +4997,20 @@
             <a:pPr algn="ctr"/>
             <a:r>
               <a:rPr sz="900"/>
-              <a:t>Категорийный менеджмент: проверка BB</a:t>
-            </a:r>
-          </a:p>
-        </p:txBody>
-      </p:sp>
-      <p:sp>
-        <p:nvSpPr>
-          <p:cNvPr id="46" name="Rectangle 45"/>
+              <a:t>Открытые заказы сетей и дистрибьюторов по EDI</a:t>
+            </a:r>
+          </a:p>
+        </p:txBody>
+      </p:sp>
+      <p:sp>
+        <p:nvSpPr>
+          <p:cNvPr id="47" name="Rectangle 46"/>
           <p:cNvSpPr/>
           <p:nvPr/>
         </p:nvSpPr>
         <p:spPr>
           <a:xfrm>
-            <a:off x="100000" y="5046665"/>
+            <a:off x="100000" y="3768568"/>
             <a:ext cx="1600000" cy="620000"/>
           </a:xfrm>
           <a:prstGeom prst="rect">
@@ -4988,20 +5041,20 @@
             <a:pPr algn="ctr"/>
             <a:r>
               <a:rPr sz="900"/>
-              <a:t>Коммерческие финансы: цены, оценка в деньгах</a:t>
-            </a:r>
-          </a:p>
-        </p:txBody>
-      </p:sp>
-      <p:sp>
-        <p:nvSpPr>
-          <p:cNvPr id="47" name="Rectangle 46"/>
+              <a:t>Категорийный менеджмент: проверка BB</a:t>
+            </a:r>
+          </a:p>
+        </p:txBody>
+      </p:sp>
+      <p:sp>
+        <p:nvSpPr>
+          <p:cNvPr id="48" name="Rectangle 47"/>
           <p:cNvSpPr/>
           <p:nvPr/>
         </p:nvSpPr>
         <p:spPr>
           <a:xfrm>
-            <a:off x="100000" y="5859998"/>
+            <a:off x="100000" y="4465710"/>
             <a:ext cx="1600000" cy="620000"/>
           </a:xfrm>
           <a:prstGeom prst="rect">
@@ -5032,6 +5085,94 @@
             <a:pPr algn="ctr"/>
             <a:r>
               <a:rPr sz="900"/>
+              <a:t>Коммерческие финансы: цены, оценка в деньгах</a:t>
+            </a:r>
+          </a:p>
+        </p:txBody>
+      </p:sp>
+      <p:sp>
+        <p:nvSpPr>
+          <p:cNvPr id="49" name="Rectangle 48"/>
+          <p:cNvSpPr/>
+          <p:nvPr/>
+        </p:nvSpPr>
+        <p:spPr>
+          <a:xfrm>
+            <a:off x="100000" y="5162852"/>
+            <a:ext cx="1600000" cy="620000"/>
+          </a:xfrm>
+          <a:prstGeom prst="rect">
+            <a:avLst/>
+          </a:prstGeom>
+          <a:solidFill>
+            <a:schemeClr val="accent2"/>
+          </a:solidFill>
+        </p:spPr>
+        <p:style>
+          <a:lnRef idx="1">
+            <a:schemeClr val="accent1"/>
+          </a:lnRef>
+          <a:fillRef idx="3">
+            <a:schemeClr val="accent1"/>
+          </a:fillRef>
+          <a:effectRef idx="2">
+            <a:schemeClr val="accent1"/>
+          </a:effectRef>
+          <a:fontRef idx="minor">
+            <a:schemeClr val="lt1"/>
+          </a:fontRef>
+        </p:style>
+        <p:txBody>
+          <a:bodyPr rtlCol="0" anchor="ctr" wrap="square"/>
+          <a:lstStyle/>
+          <a:p>
+            <a:pPr algn="ctr"/>
+            <a:r>
+              <a:rPr sz="900"/>
+              <a:t>Sales/KAM: коммерческие допущения</a:t>
+            </a:r>
+          </a:p>
+        </p:txBody>
+      </p:sp>
+      <p:sp>
+        <p:nvSpPr>
+          <p:cNvPr id="50" name="Rectangle 49"/>
+          <p:cNvSpPr/>
+          <p:nvPr/>
+        </p:nvSpPr>
+        <p:spPr>
+          <a:xfrm>
+            <a:off x="100000" y="5859994"/>
+            <a:ext cx="1600000" cy="620000"/>
+          </a:xfrm>
+          <a:prstGeom prst="rect">
+            <a:avLst/>
+          </a:prstGeom>
+          <a:solidFill>
+            <a:schemeClr val="accent2"/>
+          </a:solidFill>
+        </p:spPr>
+        <p:style>
+          <a:lnRef idx="1">
+            <a:schemeClr val="accent1"/>
+          </a:lnRef>
+          <a:fillRef idx="3">
+            <a:schemeClr val="accent1"/>
+          </a:fillRef>
+          <a:effectRef idx="2">
+            <a:schemeClr val="accent1"/>
+          </a:effectRef>
+          <a:fontRef idx="minor">
+            <a:schemeClr val="lt1"/>
+          </a:fontRef>
+        </p:style>
+        <p:txBody>
+          <a:bodyPr rtlCol="0" anchor="ctr" wrap="square"/>
+          <a:lstStyle/>
+          <a:p>
+            <a:pPr algn="ctr"/>
+            <a:r>
+              <a:rPr sz="900"/>
               <a:t>Получение ограниченного плана из модуля SNP</a:t>
             </a:r>
           </a:p>
@@ -5039,7 +5180,7 @@
       </p:sp>
       <p:cxnSp>
         <p:nvCxnSpPr>
-          <p:cNvPr id="48" name="Connector 47"/>
+          <p:cNvPr id="51" name="Connector 50"/>
           <p:cNvCxnSpPr>
             <a:stCxn id="4" idx="2"/>
             <a:endCxn id="6" idx="0"/>
@@ -5050,114 +5191,6 @@
           <a:xfrm>
             <a:off x="2895000" y="1660000"/>
             <a:ext cx="0" cy="1594000"/>
-          </a:xfrm>
-          <a:prstGeom prst="line">
-            <a:avLst/>
-          </a:prstGeom>
-          <a:ln>
-            <a:tailEnd type="triangle"/>
-          </a:ln>
-        </p:spPr>
-        <p:style>
-          <a:lnRef idx="2">
-            <a:schemeClr val="accent1"/>
-          </a:lnRef>
-          <a:fillRef idx="0">
-            <a:schemeClr val="accent1"/>
-          </a:fillRef>
-          <a:effectRef idx="1">
-            <a:schemeClr val="accent1"/>
-          </a:effectRef>
-          <a:fontRef idx="minor">
-            <a:schemeClr val="tx1"/>
-          </a:fontRef>
-        </p:style>
-      </p:cxnSp>
-      <p:cxnSp>
-        <p:nvCxnSpPr>
-          <p:cNvPr id="49" name="Connector 48"/>
-          <p:cNvCxnSpPr>
-            <a:stCxn id="6" idx="0"/>
-            <a:endCxn id="10" idx="2"/>
-          </p:cNvCxnSpPr>
-          <p:nvPr/>
-        </p:nvCxnSpPr>
-        <p:spPr>
-          <a:xfrm flipV="1">
-            <a:off x="2895000" y="1660000"/>
-            <a:ext cx="2060000" cy="1594000"/>
-          </a:xfrm>
-          <a:prstGeom prst="line">
-            <a:avLst/>
-          </a:prstGeom>
-          <a:ln>
-            <a:tailEnd type="triangle"/>
-          </a:ln>
-        </p:spPr>
-        <p:style>
-          <a:lnRef idx="2">
-            <a:schemeClr val="accent1"/>
-          </a:lnRef>
-          <a:fillRef idx="0">
-            <a:schemeClr val="accent1"/>
-          </a:fillRef>
-          <a:effectRef idx="1">
-            <a:schemeClr val="accent1"/>
-          </a:effectRef>
-          <a:fontRef idx="minor">
-            <a:schemeClr val="tx1"/>
-          </a:fontRef>
-        </p:style>
-      </p:cxnSp>
-      <p:cxnSp>
-        <p:nvCxnSpPr>
-          <p:cNvPr id="50" name="Connector 49"/>
-          <p:cNvCxnSpPr>
-            <a:stCxn id="10" idx="2"/>
-            <a:endCxn id="12" idx="0"/>
-          </p:cNvCxnSpPr>
-          <p:nvPr/>
-        </p:nvCxnSpPr>
-        <p:spPr>
-          <a:xfrm>
-            <a:off x="4955000" y="1660000"/>
-            <a:ext cx="0" cy="1090000"/>
-          </a:xfrm>
-          <a:prstGeom prst="line">
-            <a:avLst/>
-          </a:prstGeom>
-          <a:ln>
-            <a:tailEnd type="triangle"/>
-          </a:ln>
-        </p:spPr>
-        <p:style>
-          <a:lnRef idx="2">
-            <a:schemeClr val="accent1"/>
-          </a:lnRef>
-          <a:fillRef idx="0">
-            <a:schemeClr val="accent1"/>
-          </a:fillRef>
-          <a:effectRef idx="1">
-            <a:schemeClr val="accent1"/>
-          </a:effectRef>
-          <a:fontRef idx="minor">
-            <a:schemeClr val="tx1"/>
-          </a:fontRef>
-        </p:style>
-      </p:cxnSp>
-      <p:cxnSp>
-        <p:nvCxnSpPr>
-          <p:cNvPr id="51" name="Connector 50"/>
-          <p:cNvCxnSpPr>
-            <a:stCxn id="10" idx="2"/>
-            <a:endCxn id="14" idx="0"/>
-          </p:cNvCxnSpPr>
-          <p:nvPr/>
-        </p:nvCxnSpPr>
-        <p:spPr>
-          <a:xfrm>
-            <a:off x="4955000" y="1660000"/>
-            <a:ext cx="0" cy="2632000"/>
           </a:xfrm>
           <a:prstGeom prst="line">
             <a:avLst/>
@@ -5185,15 +5218,15 @@
         <p:nvCxnSpPr>
           <p:cNvPr id="52" name="Connector 51"/>
           <p:cNvCxnSpPr>
-            <a:stCxn id="12" idx="2"/>
-            <a:endCxn id="16" idx="0"/>
+            <a:stCxn id="6" idx="0"/>
+            <a:endCxn id="10" idx="2"/>
           </p:cNvCxnSpPr>
           <p:nvPr/>
         </p:nvCxnSpPr>
         <p:spPr>
-          <a:xfrm>
-            <a:off x="4955000" y="3370000"/>
-            <a:ext cx="0" cy="2464000"/>
+          <a:xfrm flipV="1">
+            <a:off x="2895000" y="1660000"/>
+            <a:ext cx="2060000" cy="1594000"/>
           </a:xfrm>
           <a:prstGeom prst="line">
             <a:avLst/>
@@ -5221,15 +5254,15 @@
         <p:nvCxnSpPr>
           <p:cNvPr id="53" name="Connector 52"/>
           <p:cNvCxnSpPr>
-            <a:stCxn id="14" idx="2"/>
-            <a:endCxn id="16" idx="0"/>
+            <a:stCxn id="10" idx="2"/>
+            <a:endCxn id="12" idx="0"/>
           </p:cNvCxnSpPr>
           <p:nvPr/>
         </p:nvCxnSpPr>
         <p:spPr>
           <a:xfrm>
-            <a:off x="4955000" y="4912000"/>
-            <a:ext cx="0" cy="922000"/>
+            <a:off x="4955000" y="1660000"/>
+            <a:ext cx="0" cy="1090000"/>
           </a:xfrm>
           <a:prstGeom prst="line">
             <a:avLst/>
@@ -5257,15 +5290,15 @@
         <p:nvCxnSpPr>
           <p:cNvPr id="54" name="Connector 53"/>
           <p:cNvCxnSpPr>
-            <a:stCxn id="16" idx="0"/>
-            <a:endCxn id="21" idx="2"/>
+            <a:stCxn id="10" idx="2"/>
+            <a:endCxn id="14" idx="0"/>
           </p:cNvCxnSpPr>
           <p:nvPr/>
         </p:nvCxnSpPr>
         <p:spPr>
-          <a:xfrm flipV="1">
+          <a:xfrm>
             <a:off x="4955000" y="1660000"/>
-            <a:ext cx="2060000" cy="4174000"/>
+            <a:ext cx="0" cy="2968000"/>
           </a:xfrm>
           <a:prstGeom prst="line">
             <a:avLst/>
@@ -5293,15 +5326,15 @@
         <p:nvCxnSpPr>
           <p:cNvPr id="55" name="Connector 54"/>
           <p:cNvCxnSpPr>
-            <a:stCxn id="16" idx="0"/>
-            <a:endCxn id="22" idx="2"/>
+            <a:stCxn id="12" idx="2"/>
+            <a:endCxn id="16" idx="0"/>
           </p:cNvCxnSpPr>
           <p:nvPr/>
         </p:nvCxnSpPr>
         <p:spPr>
-          <a:xfrm flipV="1">
-            <a:off x="4955000" y="2430000"/>
-            <a:ext cx="2060000" cy="3404000"/>
+          <a:xfrm>
+            <a:off x="4955000" y="3370000"/>
+            <a:ext cx="0" cy="2800000"/>
           </a:xfrm>
           <a:prstGeom prst="line">
             <a:avLst/>
@@ -5329,15 +5362,15 @@
         <p:nvCxnSpPr>
           <p:cNvPr id="56" name="Connector 55"/>
           <p:cNvCxnSpPr>
-            <a:stCxn id="21" idx="3"/>
-            <a:endCxn id="26" idx="1"/>
+            <a:stCxn id="14" idx="2"/>
+            <a:endCxn id="16" idx="0"/>
           </p:cNvCxnSpPr>
           <p:nvPr/>
         </p:nvCxnSpPr>
         <p:spPr>
           <a:xfrm>
-            <a:off x="7970000" y="1350000"/>
-            <a:ext cx="150000" cy="0"/>
+            <a:off x="4955000" y="5248000"/>
+            <a:ext cx="0" cy="922000"/>
           </a:xfrm>
           <a:prstGeom prst="line">
             <a:avLst/>
@@ -5365,15 +5398,15 @@
         <p:nvCxnSpPr>
           <p:cNvPr id="57" name="Connector 56"/>
           <p:cNvCxnSpPr>
-            <a:stCxn id="22" idx="3"/>
-            <a:endCxn id="26" idx="1"/>
+            <a:stCxn id="16" idx="0"/>
+            <a:endCxn id="21" idx="2"/>
           </p:cNvCxnSpPr>
           <p:nvPr/>
         </p:nvCxnSpPr>
         <p:spPr>
           <a:xfrm flipV="1">
-            <a:off x="7970000" y="1350000"/>
-            <a:ext cx="150000" cy="770000"/>
+            <a:off x="4955000" y="1660000"/>
+            <a:ext cx="2060000" cy="4510000"/>
           </a:xfrm>
           <a:prstGeom prst="line">
             <a:avLst/>
@@ -5401,15 +5434,15 @@
         <p:nvCxnSpPr>
           <p:cNvPr id="58" name="Connector 57"/>
           <p:cNvCxnSpPr>
-            <a:stCxn id="26" idx="2"/>
-            <a:endCxn id="28" idx="0"/>
+            <a:stCxn id="16" idx="0"/>
+            <a:endCxn id="23" idx="2"/>
           </p:cNvCxnSpPr>
           <p:nvPr/>
         </p:nvCxnSpPr>
         <p:spPr>
-          <a:xfrm>
-            <a:off x="9075000" y="1660000"/>
-            <a:ext cx="0" cy="1426000"/>
+          <a:xfrm flipV="1">
+            <a:off x="4955000" y="2866000"/>
+            <a:ext cx="2060000" cy="3304000"/>
           </a:xfrm>
           <a:prstGeom prst="line">
             <a:avLst/>
@@ -5437,15 +5470,15 @@
         <p:nvCxnSpPr>
           <p:cNvPr id="59" name="Connector 58"/>
           <p:cNvCxnSpPr>
-            <a:stCxn id="28" idx="3"/>
-            <a:endCxn id="32" idx="1"/>
+            <a:stCxn id="21" idx="3"/>
+            <a:endCxn id="27" idx="1"/>
           </p:cNvCxnSpPr>
           <p:nvPr/>
         </p:nvCxnSpPr>
         <p:spPr>
-          <a:xfrm flipV="1">
-            <a:off x="10030000" y="1350000"/>
-            <a:ext cx="150000" cy="2046000"/>
+          <a:xfrm>
+            <a:off x="7970000" y="1350000"/>
+            <a:ext cx="150000" cy="0"/>
           </a:xfrm>
           <a:prstGeom prst="line">
             <a:avLst/>
@@ -5473,15 +5506,15 @@
         <p:nvCxnSpPr>
           <p:cNvPr id="60" name="Connector 59"/>
           <p:cNvCxnSpPr>
-            <a:stCxn id="32" idx="2"/>
-            <a:endCxn id="34" idx="0"/>
+            <a:stCxn id="23" idx="3"/>
+            <a:endCxn id="27" idx="1"/>
           </p:cNvCxnSpPr>
           <p:nvPr/>
         </p:nvCxnSpPr>
         <p:spPr>
-          <a:xfrm>
-            <a:off x="11135000" y="1660000"/>
-            <a:ext cx="0" cy="922000"/>
+          <a:xfrm flipV="1">
+            <a:off x="7970000" y="1350000"/>
+            <a:ext cx="150000" cy="1206000"/>
           </a:xfrm>
           <a:prstGeom prst="line">
             <a:avLst/>
@@ -5509,15 +5542,15 @@
         <p:nvCxnSpPr>
           <p:cNvPr id="61" name="Connector 60"/>
           <p:cNvCxnSpPr>
-            <a:stCxn id="32" idx="2"/>
-            <a:endCxn id="36" idx="0"/>
+            <a:stCxn id="27" idx="2"/>
+            <a:endCxn id="29" idx="0"/>
           </p:cNvCxnSpPr>
           <p:nvPr/>
         </p:nvCxnSpPr>
         <p:spPr>
           <a:xfrm>
-            <a:off x="11135000" y="1660000"/>
-            <a:ext cx="0" cy="2464000"/>
+            <a:off x="9075000" y="1660000"/>
+            <a:ext cx="0" cy="1426000"/>
           </a:xfrm>
           <a:prstGeom prst="line">
             <a:avLst/>
@@ -5545,17 +5578,17 @@
         <p:nvCxnSpPr>
           <p:cNvPr id="62" name="Connector 61"/>
           <p:cNvCxnSpPr>
-            <a:stCxn id="36" idx="1"/>
-            <a:endCxn id="10" idx="3"/>
+            <a:stCxn id="29" idx="3"/>
+            <a:endCxn id="33" idx="1"/>
           </p:cNvCxnSpPr>
           <p:nvPr/>
         </p:nvCxnSpPr>
         <p:spPr>
-          <a:xfrm flipH="1" flipV="1">
-            <a:off x="5910000" y="1350000"/>
-            <a:ext cx="4270000" cy="3084000"/>
-          </a:xfrm>
-          <a:prstGeom prst="bentConnector3">
+          <a:xfrm flipV="1">
+            <a:off x="10030000" y="1350000"/>
+            <a:ext cx="150000" cy="2046000"/>
+          </a:xfrm>
+          <a:prstGeom prst="line">
             <a:avLst/>
           </a:prstGeom>
           <a:ln>
@@ -5581,15 +5614,15 @@
         <p:nvCxnSpPr>
           <p:cNvPr id="63" name="Connector 62"/>
           <p:cNvCxnSpPr>
-            <a:stCxn id="36" idx="2"/>
-            <a:endCxn id="38" idx="0"/>
+            <a:stCxn id="33" idx="2"/>
+            <a:endCxn id="35" idx="0"/>
           </p:cNvCxnSpPr>
           <p:nvPr/>
         </p:nvCxnSpPr>
         <p:spPr>
           <a:xfrm>
-            <a:off x="11135000" y="4744000"/>
-            <a:ext cx="0" cy="1426000"/>
+            <a:off x="11135000" y="1660000"/>
+            <a:ext cx="0" cy="1258000"/>
           </a:xfrm>
           <a:prstGeom prst="line">
             <a:avLst/>
@@ -5617,15 +5650,15 @@
         <p:nvCxnSpPr>
           <p:cNvPr id="64" name="Connector 63"/>
           <p:cNvCxnSpPr>
-            <a:stCxn id="41" idx="3"/>
-            <a:endCxn id="4" idx="1"/>
+            <a:stCxn id="33" idx="2"/>
+            <a:endCxn id="37" idx="0"/>
           </p:cNvCxnSpPr>
           <p:nvPr/>
         </p:nvCxnSpPr>
         <p:spPr>
           <a:xfrm>
-            <a:off x="1700000" y="1290000"/>
-            <a:ext cx="240000" cy="60000"/>
+            <a:off x="11135000" y="1660000"/>
+            <a:ext cx="0" cy="3304000"/>
           </a:xfrm>
           <a:prstGeom prst="line">
             <a:avLst/>
@@ -5653,15 +5686,15 @@
         <p:nvCxnSpPr>
           <p:cNvPr id="65" name="Connector 64"/>
           <p:cNvCxnSpPr>
-            <a:stCxn id="42" idx="3"/>
-            <a:endCxn id="16" idx="1"/>
+            <a:stCxn id="37" idx="1"/>
+            <a:endCxn id="10" idx="3"/>
           </p:cNvCxnSpPr>
           <p:nvPr/>
         </p:nvCxnSpPr>
         <p:spPr>
-          <a:xfrm>
-            <a:off x="1700000" y="2103333"/>
-            <a:ext cx="2300000" cy="4040667"/>
+          <a:xfrm flipH="1" flipV="1">
+            <a:off x="5910000" y="1350000"/>
+            <a:ext cx="4270000" cy="3924000"/>
           </a:xfrm>
           <a:prstGeom prst="bentConnector3">
             <a:avLst/>
@@ -5689,15 +5722,15 @@
         <p:nvCxnSpPr>
           <p:cNvPr id="66" name="Connector 65"/>
           <p:cNvCxnSpPr>
-            <a:stCxn id="12" idx="2"/>
-            <a:endCxn id="18" idx="0"/>
+            <a:stCxn id="37" idx="2"/>
+            <a:endCxn id="39" idx="0"/>
           </p:cNvCxnSpPr>
           <p:nvPr/>
         </p:nvCxnSpPr>
         <p:spPr>
           <a:xfrm>
-            <a:off x="4955000" y="3370000"/>
-            <a:ext cx="0" cy="4006000"/>
+            <a:off x="11135000" y="5584000"/>
+            <a:ext cx="0" cy="1426000"/>
           </a:xfrm>
           <a:prstGeom prst="line">
             <a:avLst/>
@@ -5726,16 +5759,16 @@
           <p:cNvPr id="67" name="Connector 66"/>
           <p:cNvCxnSpPr>
             <a:stCxn id="43" idx="3"/>
-            <a:endCxn id="22" idx="1"/>
+            <a:endCxn id="4" idx="1"/>
           </p:cNvCxnSpPr>
           <p:nvPr/>
         </p:nvCxnSpPr>
         <p:spPr>
-          <a:xfrm flipV="1">
-            <a:off x="1700000" y="2120000"/>
-            <a:ext cx="4360000" cy="796666"/>
-          </a:xfrm>
-          <a:prstGeom prst="bentConnector3">
+          <a:xfrm>
+            <a:off x="1700000" y="1290000"/>
+            <a:ext cx="240000" cy="60000"/>
+          </a:xfrm>
+          <a:prstGeom prst="line">
             <a:avLst/>
           </a:prstGeom>
           <a:ln>
@@ -5761,15 +5794,15 @@
         <p:nvCxnSpPr>
           <p:cNvPr id="68" name="Connector 67"/>
           <p:cNvCxnSpPr>
-            <a:stCxn id="44" idx="3"/>
-            <a:endCxn id="22" idx="1"/>
+            <a:stCxn id="44" idx="2"/>
+            <a:endCxn id="16" idx="0"/>
           </p:cNvCxnSpPr>
           <p:nvPr/>
         </p:nvCxnSpPr>
         <p:spPr>
-          <a:xfrm flipV="1">
-            <a:off x="1700000" y="2120000"/>
-            <a:ext cx="4360000" cy="1609999"/>
+          <a:xfrm>
+            <a:off x="900000" y="2297142"/>
+            <a:ext cx="4055000" cy="3872858"/>
           </a:xfrm>
           <a:prstGeom prst="bentConnector3">
             <a:avLst/>
@@ -5797,17 +5830,17 @@
         <p:nvCxnSpPr>
           <p:cNvPr id="69" name="Connector 68"/>
           <p:cNvCxnSpPr>
-            <a:stCxn id="45" idx="3"/>
-            <a:endCxn id="26" idx="1"/>
+            <a:stCxn id="12" idx="2"/>
+            <a:endCxn id="18" idx="0"/>
           </p:cNvCxnSpPr>
           <p:nvPr/>
         </p:nvCxnSpPr>
         <p:spPr>
-          <a:xfrm flipV="1">
-            <a:off x="1700000" y="1350000"/>
-            <a:ext cx="6420000" cy="3193332"/>
-          </a:xfrm>
-          <a:prstGeom prst="bentConnector3">
+          <a:xfrm>
+            <a:off x="4955000" y="3370000"/>
+            <a:ext cx="0" cy="4342000"/>
+          </a:xfrm>
+          <a:prstGeom prst="line">
             <a:avLst/>
           </a:prstGeom>
           <a:ln>
@@ -5833,15 +5866,15 @@
         <p:nvCxnSpPr>
           <p:cNvPr id="70" name="Connector 69"/>
           <p:cNvCxnSpPr>
-            <a:stCxn id="46" idx="3"/>
-            <a:endCxn id="28" idx="1"/>
+            <a:stCxn id="45" idx="3"/>
+            <a:endCxn id="23" idx="1"/>
           </p:cNvCxnSpPr>
           <p:nvPr/>
         </p:nvCxnSpPr>
         <p:spPr>
           <a:xfrm flipV="1">
-            <a:off x="1700000" y="3396000"/>
-            <a:ext cx="6420000" cy="1960665"/>
+            <a:off x="1700000" y="2556000"/>
+            <a:ext cx="4360000" cy="128284"/>
           </a:xfrm>
           <a:prstGeom prst="bentConnector3">
             <a:avLst/>
@@ -5869,15 +5902,15 @@
         <p:nvCxnSpPr>
           <p:cNvPr id="71" name="Connector 70"/>
           <p:cNvCxnSpPr>
-            <a:stCxn id="47" idx="3"/>
-            <a:endCxn id="34" idx="1"/>
+            <a:stCxn id="46" idx="3"/>
+            <a:endCxn id="23" idx="1"/>
           </p:cNvCxnSpPr>
           <p:nvPr/>
         </p:nvCxnSpPr>
         <p:spPr>
           <a:xfrm flipV="1">
-            <a:off x="1700000" y="2892000"/>
-            <a:ext cx="8480000" cy="3277998"/>
+            <a:off x="1700000" y="2556000"/>
+            <a:ext cx="4360000" cy="825426"/>
           </a:xfrm>
           <a:prstGeom prst="bentConnector3">
             <a:avLst/>
@@ -5905,15 +5938,195 @@
         <p:nvCxnSpPr>
           <p:cNvPr id="72" name="Connector 71"/>
           <p:cNvCxnSpPr>
-            <a:stCxn id="32" idx="2"/>
-            <a:endCxn id="40" idx="0"/>
+            <a:stCxn id="47" idx="3"/>
+            <a:endCxn id="27" idx="1"/>
           </p:cNvCxnSpPr>
           <p:nvPr/>
         </p:nvCxnSpPr>
         <p:spPr>
+          <a:xfrm flipV="1">
+            <a:off x="1700000" y="1350000"/>
+            <a:ext cx="6420000" cy="2728568"/>
+          </a:xfrm>
+          <a:prstGeom prst="bentConnector3">
+            <a:avLst/>
+          </a:prstGeom>
+          <a:ln>
+            <a:tailEnd type="triangle"/>
+          </a:ln>
+        </p:spPr>
+        <p:style>
+          <a:lnRef idx="2">
+            <a:schemeClr val="accent1"/>
+          </a:lnRef>
+          <a:fillRef idx="0">
+            <a:schemeClr val="accent1"/>
+          </a:fillRef>
+          <a:effectRef idx="1">
+            <a:schemeClr val="accent1"/>
+          </a:effectRef>
+          <a:fontRef idx="minor">
+            <a:schemeClr val="tx1"/>
+          </a:fontRef>
+        </p:style>
+      </p:cxnSp>
+      <p:cxnSp>
+        <p:nvCxnSpPr>
+          <p:cNvPr id="73" name="Connector 72"/>
+          <p:cNvCxnSpPr>
+            <a:stCxn id="48" idx="3"/>
+            <a:endCxn id="29" idx="1"/>
+          </p:cNvCxnSpPr>
+          <p:nvPr/>
+        </p:nvCxnSpPr>
+        <p:spPr>
+          <a:xfrm flipV="1">
+            <a:off x="1700000" y="3396000"/>
+            <a:ext cx="6420000" cy="1379710"/>
+          </a:xfrm>
+          <a:prstGeom prst="bentConnector3">
+            <a:avLst/>
+          </a:prstGeom>
+          <a:ln>
+            <a:tailEnd type="triangle"/>
+          </a:ln>
+        </p:spPr>
+        <p:style>
+          <a:lnRef idx="2">
+            <a:schemeClr val="accent1"/>
+          </a:lnRef>
+          <a:fillRef idx="0">
+            <a:schemeClr val="accent1"/>
+          </a:fillRef>
+          <a:effectRef idx="1">
+            <a:schemeClr val="accent1"/>
+          </a:effectRef>
+          <a:fontRef idx="minor">
+            <a:schemeClr val="tx1"/>
+          </a:fontRef>
+        </p:style>
+      </p:cxnSp>
+      <p:cxnSp>
+        <p:nvCxnSpPr>
+          <p:cNvPr id="74" name="Connector 73"/>
+          <p:cNvCxnSpPr>
+            <a:stCxn id="49" idx="3"/>
+            <a:endCxn id="29" idx="1"/>
+          </p:cNvCxnSpPr>
+          <p:nvPr/>
+        </p:nvCxnSpPr>
+        <p:spPr>
+          <a:xfrm flipV="1">
+            <a:off x="1700000" y="3396000"/>
+            <a:ext cx="6420000" cy="2076852"/>
+          </a:xfrm>
+          <a:prstGeom prst="bentConnector3">
+            <a:avLst/>
+          </a:prstGeom>
+          <a:ln>
+            <a:tailEnd type="triangle"/>
+          </a:ln>
+        </p:spPr>
+        <p:style>
+          <a:lnRef idx="2">
+            <a:schemeClr val="accent1"/>
+          </a:lnRef>
+          <a:fillRef idx="0">
+            <a:schemeClr val="accent1"/>
+          </a:fillRef>
+          <a:effectRef idx="1">
+            <a:schemeClr val="accent1"/>
+          </a:effectRef>
+          <a:fontRef idx="minor">
+            <a:schemeClr val="tx1"/>
+          </a:fontRef>
+        </p:style>
+      </p:cxnSp>
+      <p:cxnSp>
+        <p:nvCxnSpPr>
+          <p:cNvPr id="75" name="Connector 74"/>
+          <p:cNvCxnSpPr>
+            <a:stCxn id="50" idx="3"/>
+            <a:endCxn id="35" idx="1"/>
+          </p:cNvCxnSpPr>
+          <p:nvPr/>
+        </p:nvCxnSpPr>
+        <p:spPr>
+          <a:xfrm flipV="1">
+            <a:off x="1700000" y="3228000"/>
+            <a:ext cx="8480000" cy="2941994"/>
+          </a:xfrm>
+          <a:prstGeom prst="bentConnector3">
+            <a:avLst/>
+          </a:prstGeom>
+          <a:ln>
+            <a:tailEnd type="triangle"/>
+          </a:ln>
+        </p:spPr>
+        <p:style>
+          <a:lnRef idx="2">
+            <a:schemeClr val="accent1"/>
+          </a:lnRef>
+          <a:fillRef idx="0">
+            <a:schemeClr val="accent1"/>
+          </a:fillRef>
+          <a:effectRef idx="1">
+            <a:schemeClr val="accent1"/>
+          </a:effectRef>
+          <a:fontRef idx="minor">
+            <a:schemeClr val="tx1"/>
+          </a:fontRef>
+        </p:style>
+      </p:cxnSp>
+      <p:cxnSp>
+        <p:nvCxnSpPr>
+          <p:cNvPr id="76" name="Connector 75"/>
+          <p:cNvCxnSpPr>
+            <a:stCxn id="33" idx="2"/>
+            <a:endCxn id="41" idx="0"/>
+          </p:cNvCxnSpPr>
+          <p:nvPr/>
+        </p:nvCxnSpPr>
+        <p:spPr>
           <a:xfrm>
             <a:off x="11135000" y="1660000"/>
-            <a:ext cx="0" cy="6724000"/>
+            <a:ext cx="0" cy="7564000"/>
+          </a:xfrm>
+          <a:prstGeom prst="line">
+            <a:avLst/>
+          </a:prstGeom>
+          <a:ln>
+            <a:tailEnd type="triangle"/>
+          </a:ln>
+        </p:spPr>
+        <p:style>
+          <a:lnRef idx="2">
+            <a:schemeClr val="accent1"/>
+          </a:lnRef>
+          <a:fillRef idx="0">
+            <a:schemeClr val="accent1"/>
+          </a:fillRef>
+          <a:effectRef idx="1">
+            <a:schemeClr val="accent1"/>
+          </a:effectRef>
+          <a:fontRef idx="minor">
+            <a:schemeClr val="tx1"/>
+          </a:fontRef>
+        </p:style>
+      </p:cxnSp>
+      <p:cxnSp>
+        <p:nvCxnSpPr>
+          <p:cNvPr id="77" name="Connector 76"/>
+          <p:cNvCxnSpPr>
+            <a:stCxn id="37" idx="2"/>
+            <a:endCxn id="42" idx="0"/>
+          </p:cNvCxnSpPr>
+          <p:nvPr/>
+        </p:nvCxnSpPr>
+        <p:spPr>
+          <a:xfrm>
+            <a:off x="11135000" y="5584000"/>
+            <a:ext cx="0" cy="4410000"/>
           </a:xfrm>
           <a:prstGeom prst="line">
             <a:avLst/>
